--- a/docs/pptx/carbo/ritu-carbo-linsubhr-dosedisc-anemia3.pptx
+++ b/docs/pptx/carbo/ritu-carbo-linsubhr-dosedisc-anemia3.pptx
@@ -2443,7 +2443,7 @@
           </p:nvSpPr>
           <p:spPr>
             <a:xfrm>
-              <a:off x="909675" y="1896563"/>
+              <a:off x="911833" y="1896563"/>
               <a:ext cx="0" cy="3826579"/>
             </a:xfrm>
             <a:custGeom>
@@ -2486,7 +2486,7 @@
           </p:nvSpPr>
           <p:spPr>
             <a:xfrm>
-              <a:off x="3323794" y="1896563"/>
+              <a:off x="3322810" y="1896563"/>
               <a:ext cx="0" cy="3826579"/>
             </a:xfrm>
             <a:custGeom>
@@ -2529,7 +2529,7 @@
           </p:nvSpPr>
           <p:spPr>
             <a:xfrm>
-              <a:off x="5737913" y="1896563"/>
+              <a:off x="5733788" y="1896563"/>
               <a:ext cx="0" cy="3826579"/>
             </a:xfrm>
             <a:custGeom>
@@ -2572,7 +2572,7 @@
           </p:nvSpPr>
           <p:spPr>
             <a:xfrm>
-              <a:off x="8152032" y="1896563"/>
+              <a:off x="8144765" y="1896563"/>
               <a:ext cx="0" cy="3826579"/>
             </a:xfrm>
             <a:custGeom>
@@ -2830,7 +2830,7 @@
           </p:nvSpPr>
           <p:spPr>
             <a:xfrm>
-              <a:off x="2116734" y="1896563"/>
+              <a:off x="2117321" y="1896563"/>
               <a:ext cx="0" cy="3826579"/>
             </a:xfrm>
             <a:custGeom>
@@ -2873,7 +2873,7 @@
           </p:nvSpPr>
           <p:spPr>
             <a:xfrm>
-              <a:off x="4530853" y="1896563"/>
+              <a:off x="4528299" y="1896563"/>
               <a:ext cx="0" cy="3826579"/>
             </a:xfrm>
             <a:custGeom>
@@ -2916,7 +2916,7 @@
           </p:nvSpPr>
           <p:spPr>
             <a:xfrm>
-              <a:off x="6944973" y="1896563"/>
+              <a:off x="6939276" y="1896563"/>
               <a:ext cx="0" cy="3826579"/>
             </a:xfrm>
             <a:custGeom>
@@ -2960,533 +2960,536 @@
           <p:spPr>
             <a:xfrm>
               <a:off x="1172049" y="1896563"/>
-              <a:ext cx="7090630" cy="3587192"/>
+              <a:ext cx="7090630" cy="3583263"/>
             </a:xfrm>
             <a:custGeom>
               <a:avLst/>
               <a:pathLst>
-                <a:path w="7090630" h="3587192">
+                <a:path w="7090630" h="3583263">
                   <a:moveTo>
-                    <a:pt x="0" y="3041597"/>
+                    <a:pt x="0" y="3018151"/>
                   </a:moveTo>
                   <a:lnTo>
-                    <a:pt x="71622" y="3036898"/>
-                  </a:lnTo>
-                  <a:lnTo>
-                    <a:pt x="143245" y="3032164"/>
-                  </a:lnTo>
-                  <a:lnTo>
-                    <a:pt x="214867" y="3027393"/>
-                  </a:lnTo>
-                  <a:lnTo>
-                    <a:pt x="286490" y="3022585"/>
-                  </a:lnTo>
-                  <a:lnTo>
-                    <a:pt x="358112" y="3017740"/>
-                  </a:lnTo>
-                  <a:lnTo>
-                    <a:pt x="429735" y="3012859"/>
-                  </a:lnTo>
-                  <a:lnTo>
-                    <a:pt x="501357" y="3007939"/>
-                  </a:lnTo>
-                  <a:lnTo>
-                    <a:pt x="572980" y="3002982"/>
-                  </a:lnTo>
-                  <a:lnTo>
-                    <a:pt x="644602" y="2997987"/>
-                  </a:lnTo>
-                  <a:lnTo>
-                    <a:pt x="716225" y="2992953"/>
-                  </a:lnTo>
-                  <a:lnTo>
-                    <a:pt x="787847" y="2987880"/>
-                  </a:lnTo>
-                  <a:lnTo>
-                    <a:pt x="859470" y="2982769"/>
-                  </a:lnTo>
-                  <a:lnTo>
-                    <a:pt x="931092" y="2977618"/>
-                  </a:lnTo>
-                  <a:lnTo>
-                    <a:pt x="1002715" y="2972428"/>
-                  </a:lnTo>
-                  <a:lnTo>
-                    <a:pt x="1074337" y="2967197"/>
-                  </a:lnTo>
-                  <a:lnTo>
-                    <a:pt x="1145960" y="2961927"/>
-                  </a:lnTo>
-                  <a:lnTo>
-                    <a:pt x="1217582" y="2956616"/>
-                  </a:lnTo>
-                  <a:lnTo>
-                    <a:pt x="1289205" y="2951264"/>
-                  </a:lnTo>
-                  <a:lnTo>
-                    <a:pt x="1360827" y="2945871"/>
-                  </a:lnTo>
-                  <a:lnTo>
-                    <a:pt x="1432450" y="2940436"/>
-                  </a:lnTo>
-                  <a:lnTo>
-                    <a:pt x="1504073" y="2934960"/>
-                  </a:lnTo>
-                  <a:lnTo>
-                    <a:pt x="1575695" y="2929442"/>
-                  </a:lnTo>
-                  <a:lnTo>
-                    <a:pt x="1647318" y="2923881"/>
-                  </a:lnTo>
-                  <a:lnTo>
-                    <a:pt x="1718940" y="2918277"/>
-                  </a:lnTo>
-                  <a:lnTo>
-                    <a:pt x="1790563" y="2912631"/>
-                  </a:lnTo>
-                  <a:lnTo>
-                    <a:pt x="1862185" y="2906941"/>
-                  </a:lnTo>
-                  <a:lnTo>
-                    <a:pt x="1933808" y="2901207"/>
-                  </a:lnTo>
-                  <a:lnTo>
-                    <a:pt x="2005430" y="2895429"/>
-                  </a:lnTo>
-                  <a:lnTo>
-                    <a:pt x="2077053" y="2889606"/>
-                  </a:lnTo>
-                  <a:lnTo>
-                    <a:pt x="2148675" y="2883739"/>
-                  </a:lnTo>
-                  <a:lnTo>
-                    <a:pt x="2220298" y="2877827"/>
-                  </a:lnTo>
-                  <a:lnTo>
-                    <a:pt x="2291920" y="2871869"/>
-                  </a:lnTo>
-                  <a:lnTo>
-                    <a:pt x="2363543" y="2865866"/>
-                  </a:lnTo>
-                  <a:lnTo>
-                    <a:pt x="2435165" y="2859816"/>
-                  </a:lnTo>
-                  <a:lnTo>
-                    <a:pt x="2506788" y="2853720"/>
-                  </a:lnTo>
-                  <a:lnTo>
-                    <a:pt x="2578410" y="2847577"/>
-                  </a:lnTo>
-                  <a:lnTo>
-                    <a:pt x="2650033" y="2841387"/>
-                  </a:lnTo>
-                  <a:lnTo>
-                    <a:pt x="2721655" y="2835149"/>
-                  </a:lnTo>
-                  <a:lnTo>
-                    <a:pt x="2793278" y="2828863"/>
-                  </a:lnTo>
-                  <a:lnTo>
-                    <a:pt x="2864901" y="2822529"/>
-                  </a:lnTo>
-                  <a:lnTo>
-                    <a:pt x="2936523" y="2816146"/>
-                  </a:lnTo>
-                  <a:lnTo>
-                    <a:pt x="3008146" y="2809714"/>
-                  </a:lnTo>
-                  <a:lnTo>
-                    <a:pt x="3079768" y="2803232"/>
-                  </a:lnTo>
-                  <a:lnTo>
-                    <a:pt x="3151391" y="2796701"/>
-                  </a:lnTo>
-                  <a:lnTo>
-                    <a:pt x="3223013" y="2790120"/>
-                  </a:lnTo>
-                  <a:lnTo>
-                    <a:pt x="3294636" y="2783488"/>
-                  </a:lnTo>
-                  <a:lnTo>
-                    <a:pt x="3366258" y="2736781"/>
-                  </a:lnTo>
-                  <a:lnTo>
-                    <a:pt x="3437881" y="2683894"/>
-                  </a:lnTo>
-                  <a:lnTo>
-                    <a:pt x="3509503" y="2627954"/>
-                  </a:lnTo>
-                  <a:lnTo>
-                    <a:pt x="3581126" y="2568783"/>
-                  </a:lnTo>
-                  <a:lnTo>
-                    <a:pt x="3652748" y="2506195"/>
-                  </a:lnTo>
-                  <a:lnTo>
-                    <a:pt x="3724371" y="2439993"/>
-                  </a:lnTo>
-                  <a:lnTo>
-                    <a:pt x="3795993" y="2369969"/>
-                  </a:lnTo>
-                  <a:lnTo>
-                    <a:pt x="3867616" y="2295900"/>
-                  </a:lnTo>
-                  <a:lnTo>
-                    <a:pt x="3939238" y="2217555"/>
-                  </a:lnTo>
-                  <a:lnTo>
-                    <a:pt x="4010861" y="2134685"/>
-                  </a:lnTo>
-                  <a:lnTo>
-                    <a:pt x="4082483" y="2047030"/>
-                  </a:lnTo>
-                  <a:lnTo>
-                    <a:pt x="4154106" y="1954314"/>
-                  </a:lnTo>
-                  <a:lnTo>
-                    <a:pt x="4225729" y="1856244"/>
-                  </a:lnTo>
-                  <a:lnTo>
-                    <a:pt x="4297351" y="1752510"/>
-                  </a:lnTo>
-                  <a:lnTo>
-                    <a:pt x="4368974" y="1642787"/>
-                  </a:lnTo>
-                  <a:lnTo>
-                    <a:pt x="4440596" y="1526727"/>
-                  </a:lnTo>
-                  <a:lnTo>
-                    <a:pt x="4512219" y="1403966"/>
-                  </a:lnTo>
-                  <a:lnTo>
-                    <a:pt x="4583841" y="1274115"/>
-                  </a:lnTo>
-                  <a:lnTo>
-                    <a:pt x="4655464" y="1136767"/>
-                  </a:lnTo>
-                  <a:lnTo>
-                    <a:pt x="4727086" y="991487"/>
-                  </a:lnTo>
-                  <a:lnTo>
-                    <a:pt x="4798709" y="837818"/>
-                  </a:lnTo>
-                  <a:lnTo>
-                    <a:pt x="4870331" y="675275"/>
-                  </a:lnTo>
-                  <a:lnTo>
-                    <a:pt x="4941954" y="503346"/>
-                  </a:lnTo>
-                  <a:lnTo>
-                    <a:pt x="5013576" y="321489"/>
-                  </a:lnTo>
-                  <a:lnTo>
-                    <a:pt x="5085199" y="129131"/>
-                  </a:lnTo>
-                  <a:lnTo>
-                    <a:pt x="5130655" y="0"/>
+                    <a:pt x="71622" y="3013783"/>
+                  </a:lnTo>
+                  <a:lnTo>
+                    <a:pt x="143245" y="3009385"/>
+                  </a:lnTo>
+                  <a:lnTo>
+                    <a:pt x="214867" y="3004957"/>
+                  </a:lnTo>
+                  <a:lnTo>
+                    <a:pt x="286490" y="3000499"/>
+                  </a:lnTo>
+                  <a:lnTo>
+                    <a:pt x="358112" y="2996009"/>
+                  </a:lnTo>
+                  <a:lnTo>
+                    <a:pt x="429735" y="2991489"/>
+                  </a:lnTo>
+                  <a:lnTo>
+                    <a:pt x="501357" y="2986938"/>
+                  </a:lnTo>
+                  <a:lnTo>
+                    <a:pt x="572980" y="2982355"/>
+                  </a:lnTo>
+                  <a:lnTo>
+                    <a:pt x="644602" y="2977741"/>
+                  </a:lnTo>
+                  <a:lnTo>
+                    <a:pt x="716225" y="2973095"/>
+                  </a:lnTo>
+                  <a:lnTo>
+                    <a:pt x="787847" y="2968417"/>
+                  </a:lnTo>
+                  <a:lnTo>
+                    <a:pt x="859470" y="2963707"/>
+                  </a:lnTo>
+                  <a:lnTo>
+                    <a:pt x="931092" y="2958965"/>
+                  </a:lnTo>
+                  <a:lnTo>
+                    <a:pt x="1002715" y="2954190"/>
+                  </a:lnTo>
+                  <a:lnTo>
+                    <a:pt x="1074337" y="2949382"/>
+                  </a:lnTo>
+                  <a:lnTo>
+                    <a:pt x="1145960" y="2944541"/>
+                  </a:lnTo>
+                  <a:lnTo>
+                    <a:pt x="1217582" y="2939666"/>
+                  </a:lnTo>
+                  <a:lnTo>
+                    <a:pt x="1289205" y="2934758"/>
+                  </a:lnTo>
+                  <a:lnTo>
+                    <a:pt x="1360827" y="2929816"/>
+                  </a:lnTo>
+                  <a:lnTo>
+                    <a:pt x="1432450" y="2924841"/>
+                  </a:lnTo>
+                  <a:lnTo>
+                    <a:pt x="1504073" y="2919830"/>
+                  </a:lnTo>
+                  <a:lnTo>
+                    <a:pt x="1575695" y="2914786"/>
+                  </a:lnTo>
+                  <a:lnTo>
+                    <a:pt x="1647318" y="2909707"/>
+                  </a:lnTo>
+                  <a:lnTo>
+                    <a:pt x="1718940" y="2904592"/>
+                  </a:lnTo>
+                  <a:lnTo>
+                    <a:pt x="1790563" y="2899443"/>
+                  </a:lnTo>
+                  <a:lnTo>
+                    <a:pt x="1862185" y="2894258"/>
+                  </a:lnTo>
+                  <a:lnTo>
+                    <a:pt x="1933808" y="2889037"/>
+                  </a:lnTo>
+                  <a:lnTo>
+                    <a:pt x="2005430" y="2883781"/>
+                  </a:lnTo>
+                  <a:lnTo>
+                    <a:pt x="2077053" y="2878488"/>
+                  </a:lnTo>
+                  <a:lnTo>
+                    <a:pt x="2148675" y="2873159"/>
+                  </a:lnTo>
+                  <a:lnTo>
+                    <a:pt x="2220298" y="2867793"/>
+                  </a:lnTo>
+                  <a:lnTo>
+                    <a:pt x="2291920" y="2862391"/>
+                  </a:lnTo>
+                  <a:lnTo>
+                    <a:pt x="2363543" y="2856951"/>
+                  </a:lnTo>
+                  <a:lnTo>
+                    <a:pt x="2435165" y="2851473"/>
+                  </a:lnTo>
+                  <a:lnTo>
+                    <a:pt x="2506788" y="2845958"/>
+                  </a:lnTo>
+                  <a:lnTo>
+                    <a:pt x="2578410" y="2840405"/>
+                  </a:lnTo>
+                  <a:lnTo>
+                    <a:pt x="2650033" y="2834814"/>
+                  </a:lnTo>
+                  <a:lnTo>
+                    <a:pt x="2721655" y="2829184"/>
+                  </a:lnTo>
+                  <a:lnTo>
+                    <a:pt x="2793278" y="2823515"/>
+                  </a:lnTo>
+                  <a:lnTo>
+                    <a:pt x="2864901" y="2817808"/>
+                  </a:lnTo>
+                  <a:lnTo>
+                    <a:pt x="2936523" y="2812061"/>
+                  </a:lnTo>
+                  <a:lnTo>
+                    <a:pt x="3008146" y="2806275"/>
+                  </a:lnTo>
+                  <a:lnTo>
+                    <a:pt x="3079768" y="2800448"/>
+                  </a:lnTo>
+                  <a:lnTo>
+                    <a:pt x="3151391" y="2794582"/>
+                  </a:lnTo>
+                  <a:lnTo>
+                    <a:pt x="3223013" y="2788675"/>
+                  </a:lnTo>
+                  <a:lnTo>
+                    <a:pt x="3294636" y="2781053"/>
+                  </a:lnTo>
+                  <a:lnTo>
+                    <a:pt x="3366258" y="2731758"/>
+                  </a:lnTo>
+                  <a:lnTo>
+                    <a:pt x="3437881" y="2679675"/>
+                  </a:lnTo>
+                  <a:lnTo>
+                    <a:pt x="3509503" y="2624647"/>
+                  </a:lnTo>
+                  <a:lnTo>
+                    <a:pt x="3581126" y="2566506"/>
+                  </a:lnTo>
+                  <a:lnTo>
+                    <a:pt x="3652748" y="2505077"/>
+                  </a:lnTo>
+                  <a:lnTo>
+                    <a:pt x="3724371" y="2440174"/>
+                  </a:lnTo>
+                  <a:lnTo>
+                    <a:pt x="3795993" y="2371601"/>
+                  </a:lnTo>
+                  <a:lnTo>
+                    <a:pt x="3867616" y="2299148"/>
+                  </a:lnTo>
+                  <a:lnTo>
+                    <a:pt x="3939238" y="2222598"/>
+                  </a:lnTo>
+                  <a:lnTo>
+                    <a:pt x="4010861" y="2141719"/>
+                  </a:lnTo>
+                  <a:lnTo>
+                    <a:pt x="4082483" y="2056266"/>
+                  </a:lnTo>
+                  <a:lnTo>
+                    <a:pt x="4154106" y="1965979"/>
+                  </a:lnTo>
+                  <a:lnTo>
+                    <a:pt x="4225729" y="1870586"/>
+                  </a:lnTo>
+                  <a:lnTo>
+                    <a:pt x="4297351" y="1769798"/>
+                  </a:lnTo>
+                  <a:lnTo>
+                    <a:pt x="4368974" y="1663309"/>
+                  </a:lnTo>
+                  <a:lnTo>
+                    <a:pt x="4440596" y="1550798"/>
+                  </a:lnTo>
+                  <a:lnTo>
+                    <a:pt x="4512219" y="1431924"/>
+                  </a:lnTo>
+                  <a:lnTo>
+                    <a:pt x="4583841" y="1306326"/>
+                  </a:lnTo>
+                  <a:lnTo>
+                    <a:pt x="4655464" y="1173625"/>
+                  </a:lnTo>
+                  <a:lnTo>
+                    <a:pt x="4727086" y="1033419"/>
+                  </a:lnTo>
+                  <a:lnTo>
+                    <a:pt x="4798709" y="885283"/>
+                  </a:lnTo>
+                  <a:lnTo>
+                    <a:pt x="4870331" y="728768"/>
+                  </a:lnTo>
+                  <a:lnTo>
+                    <a:pt x="4941954" y="563402"/>
+                  </a:lnTo>
+                  <a:lnTo>
+                    <a:pt x="5013576" y="388683"/>
+                  </a:lnTo>
+                  <a:lnTo>
+                    <a:pt x="5085199" y="204083"/>
+                  </a:lnTo>
+                  <a:lnTo>
+                    <a:pt x="5156821" y="9042"/>
+                  </a:lnTo>
+                  <a:lnTo>
+                    <a:pt x="5159964" y="0"/>
                   </a:lnTo>
                   <a:lnTo>
                     <a:pt x="7090630" y="0"/>
                   </a:lnTo>
                   <a:lnTo>
-                    <a:pt x="7090630" y="2348255"/>
-                  </a:lnTo>
-                  <a:lnTo>
-                    <a:pt x="7019007" y="2358208"/>
-                  </a:lnTo>
-                  <a:lnTo>
-                    <a:pt x="6947385" y="2368085"/>
-                  </a:lnTo>
-                  <a:lnTo>
-                    <a:pt x="6875762" y="2377887"/>
-                  </a:lnTo>
-                  <a:lnTo>
-                    <a:pt x="6804139" y="2387614"/>
-                  </a:lnTo>
-                  <a:lnTo>
-                    <a:pt x="6732517" y="2397267"/>
-                  </a:lnTo>
-                  <a:lnTo>
-                    <a:pt x="6660894" y="2406846"/>
-                  </a:lnTo>
-                  <a:lnTo>
-                    <a:pt x="6589272" y="2416352"/>
-                  </a:lnTo>
-                  <a:lnTo>
-                    <a:pt x="6517649" y="2425786"/>
-                  </a:lnTo>
-                  <a:lnTo>
-                    <a:pt x="6446027" y="2435147"/>
-                  </a:lnTo>
-                  <a:lnTo>
-                    <a:pt x="6374404" y="2444437"/>
-                  </a:lnTo>
-                  <a:lnTo>
-                    <a:pt x="6302782" y="2453656"/>
-                  </a:lnTo>
-                  <a:lnTo>
-                    <a:pt x="6231159" y="2462805"/>
-                  </a:lnTo>
-                  <a:lnTo>
-                    <a:pt x="6159537" y="2471884"/>
-                  </a:lnTo>
-                  <a:lnTo>
-                    <a:pt x="6087914" y="2480894"/>
-                  </a:lnTo>
-                  <a:lnTo>
-                    <a:pt x="6016292" y="2489835"/>
-                  </a:lnTo>
-                  <a:lnTo>
-                    <a:pt x="5944669" y="2498708"/>
-                  </a:lnTo>
-                  <a:lnTo>
-                    <a:pt x="5873047" y="2507513"/>
-                  </a:lnTo>
-                  <a:lnTo>
-                    <a:pt x="5801424" y="2516251"/>
-                  </a:lnTo>
-                  <a:lnTo>
-                    <a:pt x="5729802" y="2524922"/>
-                  </a:lnTo>
-                  <a:lnTo>
-                    <a:pt x="5658179" y="2533527"/>
-                  </a:lnTo>
-                  <a:lnTo>
-                    <a:pt x="5586557" y="2542067"/>
-                  </a:lnTo>
-                  <a:lnTo>
-                    <a:pt x="5514934" y="2550541"/>
-                  </a:lnTo>
-                  <a:lnTo>
-                    <a:pt x="5443311" y="2558951"/>
-                  </a:lnTo>
-                  <a:lnTo>
-                    <a:pt x="5371689" y="2567296"/>
-                  </a:lnTo>
-                  <a:lnTo>
-                    <a:pt x="5300066" y="2575578"/>
-                  </a:lnTo>
-                  <a:lnTo>
-                    <a:pt x="5228444" y="2583796"/>
-                  </a:lnTo>
-                  <a:lnTo>
-                    <a:pt x="5156821" y="2591952"/>
-                  </a:lnTo>
-                  <a:lnTo>
-                    <a:pt x="5085199" y="2600046"/>
-                  </a:lnTo>
-                  <a:lnTo>
-                    <a:pt x="5013576" y="2608078"/>
-                  </a:lnTo>
-                  <a:lnTo>
-                    <a:pt x="4941954" y="2616048"/>
-                  </a:lnTo>
-                  <a:lnTo>
-                    <a:pt x="4870331" y="2623958"/>
-                  </a:lnTo>
-                  <a:lnTo>
-                    <a:pt x="4798709" y="2631807"/>
-                  </a:lnTo>
-                  <a:lnTo>
-                    <a:pt x="4727086" y="2639597"/>
-                  </a:lnTo>
-                  <a:lnTo>
-                    <a:pt x="4655464" y="2647327"/>
-                  </a:lnTo>
-                  <a:lnTo>
-                    <a:pt x="4583841" y="2654998"/>
-                  </a:lnTo>
-                  <a:lnTo>
-                    <a:pt x="4512219" y="2662610"/>
-                  </a:lnTo>
-                  <a:lnTo>
-                    <a:pt x="4440596" y="2670165"/>
-                  </a:lnTo>
-                  <a:lnTo>
-                    <a:pt x="4368974" y="2677662"/>
-                  </a:lnTo>
-                  <a:lnTo>
-                    <a:pt x="4297351" y="2685101"/>
-                  </a:lnTo>
-                  <a:lnTo>
-                    <a:pt x="4225729" y="2692484"/>
-                  </a:lnTo>
-                  <a:lnTo>
-                    <a:pt x="4154106" y="2699811"/>
-                  </a:lnTo>
-                  <a:lnTo>
-                    <a:pt x="4082483" y="2707081"/>
-                  </a:lnTo>
-                  <a:lnTo>
-                    <a:pt x="4010861" y="2714296"/>
-                  </a:lnTo>
-                  <a:lnTo>
-                    <a:pt x="3939238" y="2721456"/>
-                  </a:lnTo>
-                  <a:lnTo>
-                    <a:pt x="3867616" y="2728562"/>
-                  </a:lnTo>
-                  <a:lnTo>
-                    <a:pt x="3795993" y="2735613"/>
-                  </a:lnTo>
-                  <a:lnTo>
-                    <a:pt x="3724371" y="2742610"/>
-                  </a:lnTo>
-                  <a:lnTo>
-                    <a:pt x="3652748" y="2749554"/>
-                  </a:lnTo>
-                  <a:lnTo>
-                    <a:pt x="3581126" y="2756445"/>
-                  </a:lnTo>
-                  <a:lnTo>
-                    <a:pt x="3509503" y="2763284"/>
-                  </a:lnTo>
-                  <a:lnTo>
-                    <a:pt x="3437881" y="2770070"/>
-                  </a:lnTo>
-                  <a:lnTo>
-                    <a:pt x="3366258" y="2776805"/>
-                  </a:lnTo>
-                  <a:lnTo>
-                    <a:pt x="3294636" y="2786780"/>
-                  </a:lnTo>
-                  <a:lnTo>
-                    <a:pt x="3223013" y="2834050"/>
-                  </a:lnTo>
-                  <a:lnTo>
-                    <a:pt x="3151391" y="2878740"/>
-                  </a:lnTo>
-                  <a:lnTo>
-                    <a:pt x="3079768" y="2920989"/>
-                  </a:lnTo>
-                  <a:lnTo>
-                    <a:pt x="3008146" y="2960932"/>
-                  </a:lnTo>
-                  <a:lnTo>
-                    <a:pt x="2936523" y="2998694"/>
-                  </a:lnTo>
-                  <a:lnTo>
-                    <a:pt x="2864901" y="3034395"/>
-                  </a:lnTo>
-                  <a:lnTo>
-                    <a:pt x="2793278" y="3068147"/>
-                  </a:lnTo>
-                  <a:lnTo>
-                    <a:pt x="2721655" y="3100056"/>
-                  </a:lnTo>
-                  <a:lnTo>
-                    <a:pt x="2650033" y="3130224"/>
-                  </a:lnTo>
-                  <a:lnTo>
-                    <a:pt x="2578410" y="3158744"/>
-                  </a:lnTo>
-                  <a:lnTo>
-                    <a:pt x="2506788" y="3185707"/>
-                  </a:lnTo>
-                  <a:lnTo>
-                    <a:pt x="2435165" y="3211199"/>
-                  </a:lnTo>
-                  <a:lnTo>
-                    <a:pt x="2363543" y="3235298"/>
-                  </a:lnTo>
-                  <a:lnTo>
-                    <a:pt x="2291920" y="3258082"/>
-                  </a:lnTo>
-                  <a:lnTo>
-                    <a:pt x="2220298" y="3279622"/>
-                  </a:lnTo>
-                  <a:lnTo>
-                    <a:pt x="2148675" y="3299987"/>
-                  </a:lnTo>
-                  <a:lnTo>
-                    <a:pt x="2077053" y="3319239"/>
-                  </a:lnTo>
-                  <a:lnTo>
-                    <a:pt x="2005430" y="3337441"/>
-                  </a:lnTo>
-                  <a:lnTo>
-                    <a:pt x="1933808" y="3354648"/>
-                  </a:lnTo>
-                  <a:lnTo>
-                    <a:pt x="1862185" y="3370917"/>
-                  </a:lnTo>
-                  <a:lnTo>
-                    <a:pt x="1790563" y="3386297"/>
-                  </a:lnTo>
-                  <a:lnTo>
-                    <a:pt x="1718940" y="3400838"/>
-                  </a:lnTo>
-                  <a:lnTo>
-                    <a:pt x="1647318" y="3414584"/>
-                  </a:lnTo>
-                  <a:lnTo>
-                    <a:pt x="1575695" y="3427581"/>
-                  </a:lnTo>
-                  <a:lnTo>
-                    <a:pt x="1504073" y="3439867"/>
-                  </a:lnTo>
-                  <a:lnTo>
-                    <a:pt x="1432450" y="3451483"/>
-                  </a:lnTo>
-                  <a:lnTo>
-                    <a:pt x="1360827" y="3462465"/>
-                  </a:lnTo>
-                  <a:lnTo>
-                    <a:pt x="1289205" y="3472848"/>
-                  </a:lnTo>
-                  <a:lnTo>
-                    <a:pt x="1217582" y="3482663"/>
-                  </a:lnTo>
-                  <a:lnTo>
-                    <a:pt x="1145960" y="3491943"/>
-                  </a:lnTo>
-                  <a:lnTo>
-                    <a:pt x="1074337" y="3500716"/>
-                  </a:lnTo>
-                  <a:lnTo>
-                    <a:pt x="1002715" y="3509010"/>
-                  </a:lnTo>
-                  <a:lnTo>
-                    <a:pt x="931092" y="3516851"/>
-                  </a:lnTo>
-                  <a:lnTo>
-                    <a:pt x="859470" y="3524265"/>
-                  </a:lnTo>
-                  <a:lnTo>
-                    <a:pt x="787847" y="3531273"/>
-                  </a:lnTo>
-                  <a:lnTo>
-                    <a:pt x="716225" y="3537899"/>
-                  </a:lnTo>
-                  <a:lnTo>
-                    <a:pt x="644602" y="3544163"/>
-                  </a:lnTo>
-                  <a:lnTo>
-                    <a:pt x="572980" y="3550086"/>
-                  </a:lnTo>
-                  <a:lnTo>
-                    <a:pt x="501357" y="3555684"/>
-                  </a:lnTo>
-                  <a:lnTo>
-                    <a:pt x="429735" y="3560978"/>
-                  </a:lnTo>
-                  <a:lnTo>
-                    <a:pt x="358112" y="3565982"/>
-                  </a:lnTo>
-                  <a:lnTo>
-                    <a:pt x="286490" y="3570713"/>
-                  </a:lnTo>
-                  <a:lnTo>
-                    <a:pt x="214867" y="3575186"/>
-                  </a:lnTo>
-                  <a:lnTo>
-                    <a:pt x="143245" y="3579414"/>
-                  </a:lnTo>
-                  <a:lnTo>
-                    <a:pt x="71622" y="3583412"/>
-                  </a:lnTo>
-                  <a:lnTo>
-                    <a:pt x="0" y="3587192"/>
+                    <a:pt x="7090630" y="2401281"/>
+                  </a:lnTo>
+                  <a:lnTo>
+                    <a:pt x="7019007" y="2409836"/>
+                  </a:lnTo>
+                  <a:lnTo>
+                    <a:pt x="6947385" y="2418333"/>
+                  </a:lnTo>
+                  <a:lnTo>
+                    <a:pt x="6875762" y="2426772"/>
+                  </a:lnTo>
+                  <a:lnTo>
+                    <a:pt x="6804139" y="2435152"/>
+                  </a:lnTo>
+                  <a:lnTo>
+                    <a:pt x="6732517" y="2443476"/>
+                  </a:lnTo>
+                  <a:lnTo>
+                    <a:pt x="6660894" y="2451743"/>
+                  </a:lnTo>
+                  <a:lnTo>
+                    <a:pt x="6589272" y="2459953"/>
+                  </a:lnTo>
+                  <a:lnTo>
+                    <a:pt x="6517649" y="2468107"/>
+                  </a:lnTo>
+                  <a:lnTo>
+                    <a:pt x="6446027" y="2476206"/>
+                  </a:lnTo>
+                  <a:lnTo>
+                    <a:pt x="6374404" y="2484249"/>
+                  </a:lnTo>
+                  <a:lnTo>
+                    <a:pt x="6302782" y="2492237"/>
+                  </a:lnTo>
+                  <a:lnTo>
+                    <a:pt x="6231159" y="2500170"/>
+                  </a:lnTo>
+                  <a:lnTo>
+                    <a:pt x="6159537" y="2508049"/>
+                  </a:lnTo>
+                  <a:lnTo>
+                    <a:pt x="6087914" y="2515875"/>
+                  </a:lnTo>
+                  <a:lnTo>
+                    <a:pt x="6016292" y="2523646"/>
+                  </a:lnTo>
+                  <a:lnTo>
+                    <a:pt x="5944669" y="2531365"/>
+                  </a:lnTo>
+                  <a:lnTo>
+                    <a:pt x="5873047" y="2539031"/>
+                  </a:lnTo>
+                  <a:lnTo>
+                    <a:pt x="5801424" y="2546645"/>
+                  </a:lnTo>
+                  <a:lnTo>
+                    <a:pt x="5729802" y="2554206"/>
+                  </a:lnTo>
+                  <a:lnTo>
+                    <a:pt x="5658179" y="2561716"/>
+                  </a:lnTo>
+                  <a:lnTo>
+                    <a:pt x="5586557" y="2569174"/>
+                  </a:lnTo>
+                  <a:lnTo>
+                    <a:pt x="5514934" y="2576581"/>
+                  </a:lnTo>
+                  <a:lnTo>
+                    <a:pt x="5443311" y="2583938"/>
+                  </a:lnTo>
+                  <a:lnTo>
+                    <a:pt x="5371689" y="2591245"/>
+                  </a:lnTo>
+                  <a:lnTo>
+                    <a:pt x="5300066" y="2598501"/>
+                  </a:lnTo>
+                  <a:lnTo>
+                    <a:pt x="5228444" y="2605708"/>
+                  </a:lnTo>
+                  <a:lnTo>
+                    <a:pt x="5156821" y="2612866"/>
+                  </a:lnTo>
+                  <a:lnTo>
+                    <a:pt x="5085199" y="2619975"/>
+                  </a:lnTo>
+                  <a:lnTo>
+                    <a:pt x="5013576" y="2627035"/>
+                  </a:lnTo>
+                  <a:lnTo>
+                    <a:pt x="4941954" y="2634046"/>
+                  </a:lnTo>
+                  <a:lnTo>
+                    <a:pt x="4870331" y="2641010"/>
+                  </a:lnTo>
+                  <a:lnTo>
+                    <a:pt x="4798709" y="2647927"/>
+                  </a:lnTo>
+                  <a:lnTo>
+                    <a:pt x="4727086" y="2654796"/>
+                  </a:lnTo>
+                  <a:lnTo>
+                    <a:pt x="4655464" y="2661618"/>
+                  </a:lnTo>
+                  <a:lnTo>
+                    <a:pt x="4583841" y="2668393"/>
+                  </a:lnTo>
+                  <a:lnTo>
+                    <a:pt x="4512219" y="2675122"/>
+                  </a:lnTo>
+                  <a:lnTo>
+                    <a:pt x="4440596" y="2681805"/>
+                  </a:lnTo>
+                  <a:lnTo>
+                    <a:pt x="4368974" y="2688443"/>
+                  </a:lnTo>
+                  <a:lnTo>
+                    <a:pt x="4297351" y="2695035"/>
+                  </a:lnTo>
+                  <a:lnTo>
+                    <a:pt x="4225729" y="2701582"/>
+                  </a:lnTo>
+                  <a:lnTo>
+                    <a:pt x="4154106" y="2708084"/>
+                  </a:lnTo>
+                  <a:lnTo>
+                    <a:pt x="4082483" y="2714541"/>
+                  </a:lnTo>
+                  <a:lnTo>
+                    <a:pt x="4010861" y="2720955"/>
+                  </a:lnTo>
+                  <a:lnTo>
+                    <a:pt x="3939238" y="2727325"/>
+                  </a:lnTo>
+                  <a:lnTo>
+                    <a:pt x="3867616" y="2733651"/>
+                  </a:lnTo>
+                  <a:lnTo>
+                    <a:pt x="3795993" y="2739934"/>
+                  </a:lnTo>
+                  <a:lnTo>
+                    <a:pt x="3724371" y="2746174"/>
+                  </a:lnTo>
+                  <a:lnTo>
+                    <a:pt x="3652748" y="2752371"/>
+                  </a:lnTo>
+                  <a:lnTo>
+                    <a:pt x="3581126" y="2758526"/>
+                  </a:lnTo>
+                  <a:lnTo>
+                    <a:pt x="3509503" y="2764639"/>
+                  </a:lnTo>
+                  <a:lnTo>
+                    <a:pt x="3437881" y="2770710"/>
+                  </a:lnTo>
+                  <a:lnTo>
+                    <a:pt x="3366258" y="2776739"/>
+                  </a:lnTo>
+                  <a:lnTo>
+                    <a:pt x="3294636" y="2782728"/>
+                  </a:lnTo>
+                  <a:lnTo>
+                    <a:pt x="3223013" y="2827709"/>
+                  </a:lnTo>
+                  <a:lnTo>
+                    <a:pt x="3151391" y="2871867"/>
+                  </a:lnTo>
+                  <a:lnTo>
+                    <a:pt x="3079768" y="2913662"/>
+                  </a:lnTo>
+                  <a:lnTo>
+                    <a:pt x="3008146" y="2953219"/>
+                  </a:lnTo>
+                  <a:lnTo>
+                    <a:pt x="2936523" y="2990659"/>
+                  </a:lnTo>
+                  <a:lnTo>
+                    <a:pt x="2864901" y="3026095"/>
+                  </a:lnTo>
+                  <a:lnTo>
+                    <a:pt x="2793278" y="3059634"/>
+                  </a:lnTo>
+                  <a:lnTo>
+                    <a:pt x="2721655" y="3091378"/>
+                  </a:lnTo>
+                  <a:lnTo>
+                    <a:pt x="2650033" y="3121422"/>
+                  </a:lnTo>
+                  <a:lnTo>
+                    <a:pt x="2578410" y="3149858"/>
+                  </a:lnTo>
+                  <a:lnTo>
+                    <a:pt x="2506788" y="3176772"/>
+                  </a:lnTo>
+                  <a:lnTo>
+                    <a:pt x="2435165" y="3202245"/>
+                  </a:lnTo>
+                  <a:lnTo>
+                    <a:pt x="2363543" y="3226355"/>
+                  </a:lnTo>
+                  <a:lnTo>
+                    <a:pt x="2291920" y="3249174"/>
+                  </a:lnTo>
+                  <a:lnTo>
+                    <a:pt x="2220298" y="3270772"/>
+                  </a:lnTo>
+                  <a:lnTo>
+                    <a:pt x="2148675" y="3291213"/>
+                  </a:lnTo>
+                  <a:lnTo>
+                    <a:pt x="2077053" y="3310560"/>
+                  </a:lnTo>
+                  <a:lnTo>
+                    <a:pt x="2005430" y="3328872"/>
+                  </a:lnTo>
+                  <a:lnTo>
+                    <a:pt x="1933808" y="3346203"/>
+                  </a:lnTo>
+                  <a:lnTo>
+                    <a:pt x="1862185" y="3362607"/>
+                  </a:lnTo>
+                  <a:lnTo>
+                    <a:pt x="1790563" y="3378133"/>
+                  </a:lnTo>
+                  <a:lnTo>
+                    <a:pt x="1718940" y="3392827"/>
+                  </a:lnTo>
+                  <a:lnTo>
+                    <a:pt x="1647318" y="3406735"/>
+                  </a:lnTo>
+                  <a:lnTo>
+                    <a:pt x="1575695" y="3419898"/>
+                  </a:lnTo>
+                  <a:lnTo>
+                    <a:pt x="1504073" y="3432357"/>
+                  </a:lnTo>
+                  <a:lnTo>
+                    <a:pt x="1432450" y="3444149"/>
+                  </a:lnTo>
+                  <a:lnTo>
+                    <a:pt x="1360827" y="3455310"/>
+                  </a:lnTo>
+                  <a:lnTo>
+                    <a:pt x="1289205" y="3465873"/>
+                  </a:lnTo>
+                  <a:lnTo>
+                    <a:pt x="1217582" y="3475871"/>
+                  </a:lnTo>
+                  <a:lnTo>
+                    <a:pt x="1145960" y="3485333"/>
+                  </a:lnTo>
+                  <a:lnTo>
+                    <a:pt x="1074337" y="3494289"/>
+                  </a:lnTo>
+                  <a:lnTo>
+                    <a:pt x="1002715" y="3502766"/>
+                  </a:lnTo>
+                  <a:lnTo>
+                    <a:pt x="931092" y="3510789"/>
+                  </a:lnTo>
+                  <a:lnTo>
+                    <a:pt x="859470" y="3518382"/>
+                  </a:lnTo>
+                  <a:lnTo>
+                    <a:pt x="787847" y="3525569"/>
+                  </a:lnTo>
+                  <a:lnTo>
+                    <a:pt x="716225" y="3532371"/>
+                  </a:lnTo>
+                  <a:lnTo>
+                    <a:pt x="644602" y="3538810"/>
+                  </a:lnTo>
+                  <a:lnTo>
+                    <a:pt x="572980" y="3544903"/>
+                  </a:lnTo>
+                  <a:lnTo>
+                    <a:pt x="501357" y="3550670"/>
+                  </a:lnTo>
+                  <a:lnTo>
+                    <a:pt x="429735" y="3556129"/>
+                  </a:lnTo>
+                  <a:lnTo>
+                    <a:pt x="358112" y="3561295"/>
+                  </a:lnTo>
+                  <a:lnTo>
+                    <a:pt x="286490" y="3566185"/>
+                  </a:lnTo>
+                  <a:lnTo>
+                    <a:pt x="214867" y="3570813"/>
+                  </a:lnTo>
+                  <a:lnTo>
+                    <a:pt x="143245" y="3575194"/>
+                  </a:lnTo>
+                  <a:lnTo>
+                    <a:pt x="71622" y="3579339"/>
+                  </a:lnTo>
+                  <a:lnTo>
+                    <a:pt x="0" y="3583263"/>
                   </a:lnTo>
                   <a:close/>
                 </a:path>
@@ -3513,230 +3516,233 @@
           <p:spPr>
             <a:xfrm>
               <a:off x="1172049" y="1896563"/>
-              <a:ext cx="5130655" cy="3041597"/>
+              <a:ext cx="5159964" cy="3018151"/>
             </a:xfrm>
             <a:custGeom>
               <a:avLst/>
               <a:pathLst>
-                <a:path w="5130655" h="3041597">
+                <a:path w="5159964" h="3018151">
                   <a:moveTo>
-                    <a:pt x="0" y="3041597"/>
+                    <a:pt x="0" y="3018151"/>
                   </a:moveTo>
                   <a:lnTo>
-                    <a:pt x="71622" y="3036898"/>
-                  </a:lnTo>
-                  <a:lnTo>
-                    <a:pt x="143245" y="3032164"/>
-                  </a:lnTo>
-                  <a:lnTo>
-                    <a:pt x="214867" y="3027393"/>
-                  </a:lnTo>
-                  <a:lnTo>
-                    <a:pt x="286490" y="3022585"/>
-                  </a:lnTo>
-                  <a:lnTo>
-                    <a:pt x="358112" y="3017740"/>
-                  </a:lnTo>
-                  <a:lnTo>
-                    <a:pt x="429735" y="3012859"/>
-                  </a:lnTo>
-                  <a:lnTo>
-                    <a:pt x="501357" y="3007939"/>
-                  </a:lnTo>
-                  <a:lnTo>
-                    <a:pt x="572980" y="3002982"/>
-                  </a:lnTo>
-                  <a:lnTo>
-                    <a:pt x="644602" y="2997987"/>
-                  </a:lnTo>
-                  <a:lnTo>
-                    <a:pt x="716225" y="2992953"/>
-                  </a:lnTo>
-                  <a:lnTo>
-                    <a:pt x="787847" y="2987880"/>
-                  </a:lnTo>
-                  <a:lnTo>
-                    <a:pt x="859470" y="2982769"/>
-                  </a:lnTo>
-                  <a:lnTo>
-                    <a:pt x="931092" y="2977618"/>
-                  </a:lnTo>
-                  <a:lnTo>
-                    <a:pt x="1002715" y="2972428"/>
-                  </a:lnTo>
-                  <a:lnTo>
-                    <a:pt x="1074337" y="2967197"/>
-                  </a:lnTo>
-                  <a:lnTo>
-                    <a:pt x="1145960" y="2961927"/>
-                  </a:lnTo>
-                  <a:lnTo>
-                    <a:pt x="1217582" y="2956616"/>
-                  </a:lnTo>
-                  <a:lnTo>
-                    <a:pt x="1289205" y="2951264"/>
-                  </a:lnTo>
-                  <a:lnTo>
-                    <a:pt x="1360827" y="2945871"/>
-                  </a:lnTo>
-                  <a:lnTo>
-                    <a:pt x="1432450" y="2940436"/>
-                  </a:lnTo>
-                  <a:lnTo>
-                    <a:pt x="1504073" y="2934960"/>
-                  </a:lnTo>
-                  <a:lnTo>
-                    <a:pt x="1575695" y="2929442"/>
-                  </a:lnTo>
-                  <a:lnTo>
-                    <a:pt x="1647318" y="2923881"/>
-                  </a:lnTo>
-                  <a:lnTo>
-                    <a:pt x="1718940" y="2918277"/>
-                  </a:lnTo>
-                  <a:lnTo>
-                    <a:pt x="1790563" y="2912631"/>
-                  </a:lnTo>
-                  <a:lnTo>
-                    <a:pt x="1862185" y="2906941"/>
-                  </a:lnTo>
-                  <a:lnTo>
-                    <a:pt x="1933808" y="2901207"/>
-                  </a:lnTo>
-                  <a:lnTo>
-                    <a:pt x="2005430" y="2895429"/>
-                  </a:lnTo>
-                  <a:lnTo>
-                    <a:pt x="2077053" y="2889606"/>
-                  </a:lnTo>
-                  <a:lnTo>
-                    <a:pt x="2148675" y="2883739"/>
-                  </a:lnTo>
-                  <a:lnTo>
-                    <a:pt x="2220298" y="2877827"/>
-                  </a:lnTo>
-                  <a:lnTo>
-                    <a:pt x="2291920" y="2871869"/>
-                  </a:lnTo>
-                  <a:lnTo>
-                    <a:pt x="2363543" y="2865866"/>
-                  </a:lnTo>
-                  <a:lnTo>
-                    <a:pt x="2435165" y="2859816"/>
-                  </a:lnTo>
-                  <a:lnTo>
-                    <a:pt x="2506788" y="2853720"/>
-                  </a:lnTo>
-                  <a:lnTo>
-                    <a:pt x="2578410" y="2847577"/>
-                  </a:lnTo>
-                  <a:lnTo>
-                    <a:pt x="2650033" y="2841387"/>
-                  </a:lnTo>
-                  <a:lnTo>
-                    <a:pt x="2721655" y="2835149"/>
-                  </a:lnTo>
-                  <a:lnTo>
-                    <a:pt x="2793278" y="2828863"/>
-                  </a:lnTo>
-                  <a:lnTo>
-                    <a:pt x="2864901" y="2822529"/>
-                  </a:lnTo>
-                  <a:lnTo>
-                    <a:pt x="2936523" y="2816146"/>
-                  </a:lnTo>
-                  <a:lnTo>
-                    <a:pt x="3008146" y="2809714"/>
-                  </a:lnTo>
-                  <a:lnTo>
-                    <a:pt x="3079768" y="2803232"/>
-                  </a:lnTo>
-                  <a:lnTo>
-                    <a:pt x="3151391" y="2796701"/>
-                  </a:lnTo>
-                  <a:lnTo>
-                    <a:pt x="3223013" y="2790120"/>
-                  </a:lnTo>
-                  <a:lnTo>
-                    <a:pt x="3294636" y="2783488"/>
-                  </a:lnTo>
-                  <a:lnTo>
-                    <a:pt x="3366258" y="2736781"/>
-                  </a:lnTo>
-                  <a:lnTo>
-                    <a:pt x="3437881" y="2683894"/>
-                  </a:lnTo>
-                  <a:lnTo>
-                    <a:pt x="3509503" y="2627954"/>
-                  </a:lnTo>
-                  <a:lnTo>
-                    <a:pt x="3581126" y="2568783"/>
-                  </a:lnTo>
-                  <a:lnTo>
-                    <a:pt x="3652748" y="2506195"/>
-                  </a:lnTo>
-                  <a:lnTo>
-                    <a:pt x="3724371" y="2439993"/>
-                  </a:lnTo>
-                  <a:lnTo>
-                    <a:pt x="3795993" y="2369969"/>
-                  </a:lnTo>
-                  <a:lnTo>
-                    <a:pt x="3867616" y="2295900"/>
-                  </a:lnTo>
-                  <a:lnTo>
-                    <a:pt x="3939238" y="2217555"/>
-                  </a:lnTo>
-                  <a:lnTo>
-                    <a:pt x="4010861" y="2134685"/>
-                  </a:lnTo>
-                  <a:lnTo>
-                    <a:pt x="4082483" y="2047030"/>
-                  </a:lnTo>
-                  <a:lnTo>
-                    <a:pt x="4154106" y="1954314"/>
-                  </a:lnTo>
-                  <a:lnTo>
-                    <a:pt x="4225729" y="1856244"/>
-                  </a:lnTo>
-                  <a:lnTo>
-                    <a:pt x="4297351" y="1752510"/>
-                  </a:lnTo>
-                  <a:lnTo>
-                    <a:pt x="4368974" y="1642787"/>
-                  </a:lnTo>
-                  <a:lnTo>
-                    <a:pt x="4440596" y="1526727"/>
-                  </a:lnTo>
-                  <a:lnTo>
-                    <a:pt x="4512219" y="1403966"/>
-                  </a:lnTo>
-                  <a:lnTo>
-                    <a:pt x="4583841" y="1274115"/>
-                  </a:lnTo>
-                  <a:lnTo>
-                    <a:pt x="4655464" y="1136767"/>
-                  </a:lnTo>
-                  <a:lnTo>
-                    <a:pt x="4727086" y="991487"/>
-                  </a:lnTo>
-                  <a:lnTo>
-                    <a:pt x="4798709" y="837818"/>
-                  </a:lnTo>
-                  <a:lnTo>
-                    <a:pt x="4870331" y="675275"/>
-                  </a:lnTo>
-                  <a:lnTo>
-                    <a:pt x="4941954" y="503346"/>
-                  </a:lnTo>
-                  <a:lnTo>
-                    <a:pt x="5013576" y="321489"/>
-                  </a:lnTo>
-                  <a:lnTo>
-                    <a:pt x="5085199" y="129131"/>
-                  </a:lnTo>
-                  <a:lnTo>
-                    <a:pt x="5130655" y="0"/>
+                    <a:pt x="71622" y="3013783"/>
+                  </a:lnTo>
+                  <a:lnTo>
+                    <a:pt x="143245" y="3009385"/>
+                  </a:lnTo>
+                  <a:lnTo>
+                    <a:pt x="214867" y="3004957"/>
+                  </a:lnTo>
+                  <a:lnTo>
+                    <a:pt x="286490" y="3000499"/>
+                  </a:lnTo>
+                  <a:lnTo>
+                    <a:pt x="358112" y="2996009"/>
+                  </a:lnTo>
+                  <a:lnTo>
+                    <a:pt x="429735" y="2991489"/>
+                  </a:lnTo>
+                  <a:lnTo>
+                    <a:pt x="501357" y="2986938"/>
+                  </a:lnTo>
+                  <a:lnTo>
+                    <a:pt x="572980" y="2982355"/>
+                  </a:lnTo>
+                  <a:lnTo>
+                    <a:pt x="644602" y="2977741"/>
+                  </a:lnTo>
+                  <a:lnTo>
+                    <a:pt x="716225" y="2973095"/>
+                  </a:lnTo>
+                  <a:lnTo>
+                    <a:pt x="787847" y="2968417"/>
+                  </a:lnTo>
+                  <a:lnTo>
+                    <a:pt x="859470" y="2963707"/>
+                  </a:lnTo>
+                  <a:lnTo>
+                    <a:pt x="931092" y="2958965"/>
+                  </a:lnTo>
+                  <a:lnTo>
+                    <a:pt x="1002715" y="2954190"/>
+                  </a:lnTo>
+                  <a:lnTo>
+                    <a:pt x="1074337" y="2949382"/>
+                  </a:lnTo>
+                  <a:lnTo>
+                    <a:pt x="1145960" y="2944541"/>
+                  </a:lnTo>
+                  <a:lnTo>
+                    <a:pt x="1217582" y="2939666"/>
+                  </a:lnTo>
+                  <a:lnTo>
+                    <a:pt x="1289205" y="2934758"/>
+                  </a:lnTo>
+                  <a:lnTo>
+                    <a:pt x="1360827" y="2929816"/>
+                  </a:lnTo>
+                  <a:lnTo>
+                    <a:pt x="1432450" y="2924841"/>
+                  </a:lnTo>
+                  <a:lnTo>
+                    <a:pt x="1504073" y="2919830"/>
+                  </a:lnTo>
+                  <a:lnTo>
+                    <a:pt x="1575695" y="2914786"/>
+                  </a:lnTo>
+                  <a:lnTo>
+                    <a:pt x="1647318" y="2909707"/>
+                  </a:lnTo>
+                  <a:lnTo>
+                    <a:pt x="1718940" y="2904592"/>
+                  </a:lnTo>
+                  <a:lnTo>
+                    <a:pt x="1790563" y="2899443"/>
+                  </a:lnTo>
+                  <a:lnTo>
+                    <a:pt x="1862185" y="2894258"/>
+                  </a:lnTo>
+                  <a:lnTo>
+                    <a:pt x="1933808" y="2889037"/>
+                  </a:lnTo>
+                  <a:lnTo>
+                    <a:pt x="2005430" y="2883781"/>
+                  </a:lnTo>
+                  <a:lnTo>
+                    <a:pt x="2077053" y="2878488"/>
+                  </a:lnTo>
+                  <a:lnTo>
+                    <a:pt x="2148675" y="2873159"/>
+                  </a:lnTo>
+                  <a:lnTo>
+                    <a:pt x="2220298" y="2867793"/>
+                  </a:lnTo>
+                  <a:lnTo>
+                    <a:pt x="2291920" y="2862391"/>
+                  </a:lnTo>
+                  <a:lnTo>
+                    <a:pt x="2363543" y="2856951"/>
+                  </a:lnTo>
+                  <a:lnTo>
+                    <a:pt x="2435165" y="2851473"/>
+                  </a:lnTo>
+                  <a:lnTo>
+                    <a:pt x="2506788" y="2845958"/>
+                  </a:lnTo>
+                  <a:lnTo>
+                    <a:pt x="2578410" y="2840405"/>
+                  </a:lnTo>
+                  <a:lnTo>
+                    <a:pt x="2650033" y="2834814"/>
+                  </a:lnTo>
+                  <a:lnTo>
+                    <a:pt x="2721655" y="2829184"/>
+                  </a:lnTo>
+                  <a:lnTo>
+                    <a:pt x="2793278" y="2823515"/>
+                  </a:lnTo>
+                  <a:lnTo>
+                    <a:pt x="2864901" y="2817808"/>
+                  </a:lnTo>
+                  <a:lnTo>
+                    <a:pt x="2936523" y="2812061"/>
+                  </a:lnTo>
+                  <a:lnTo>
+                    <a:pt x="3008146" y="2806275"/>
+                  </a:lnTo>
+                  <a:lnTo>
+                    <a:pt x="3079768" y="2800448"/>
+                  </a:lnTo>
+                  <a:lnTo>
+                    <a:pt x="3151391" y="2794582"/>
+                  </a:lnTo>
+                  <a:lnTo>
+                    <a:pt x="3223013" y="2788675"/>
+                  </a:lnTo>
+                  <a:lnTo>
+                    <a:pt x="3294636" y="2781053"/>
+                  </a:lnTo>
+                  <a:lnTo>
+                    <a:pt x="3366258" y="2731758"/>
+                  </a:lnTo>
+                  <a:lnTo>
+                    <a:pt x="3437881" y="2679675"/>
+                  </a:lnTo>
+                  <a:lnTo>
+                    <a:pt x="3509503" y="2624647"/>
+                  </a:lnTo>
+                  <a:lnTo>
+                    <a:pt x="3581126" y="2566506"/>
+                  </a:lnTo>
+                  <a:lnTo>
+                    <a:pt x="3652748" y="2505077"/>
+                  </a:lnTo>
+                  <a:lnTo>
+                    <a:pt x="3724371" y="2440174"/>
+                  </a:lnTo>
+                  <a:lnTo>
+                    <a:pt x="3795993" y="2371601"/>
+                  </a:lnTo>
+                  <a:lnTo>
+                    <a:pt x="3867616" y="2299148"/>
+                  </a:lnTo>
+                  <a:lnTo>
+                    <a:pt x="3939238" y="2222598"/>
+                  </a:lnTo>
+                  <a:lnTo>
+                    <a:pt x="4010861" y="2141719"/>
+                  </a:lnTo>
+                  <a:lnTo>
+                    <a:pt x="4082483" y="2056266"/>
+                  </a:lnTo>
+                  <a:lnTo>
+                    <a:pt x="4154106" y="1965979"/>
+                  </a:lnTo>
+                  <a:lnTo>
+                    <a:pt x="4225729" y="1870586"/>
+                  </a:lnTo>
+                  <a:lnTo>
+                    <a:pt x="4297351" y="1769798"/>
+                  </a:lnTo>
+                  <a:lnTo>
+                    <a:pt x="4368974" y="1663309"/>
+                  </a:lnTo>
+                  <a:lnTo>
+                    <a:pt x="4440596" y="1550798"/>
+                  </a:lnTo>
+                  <a:lnTo>
+                    <a:pt x="4512219" y="1431924"/>
+                  </a:lnTo>
+                  <a:lnTo>
+                    <a:pt x="4583841" y="1306326"/>
+                  </a:lnTo>
+                  <a:lnTo>
+                    <a:pt x="4655464" y="1173625"/>
+                  </a:lnTo>
+                  <a:lnTo>
+                    <a:pt x="4727086" y="1033419"/>
+                  </a:lnTo>
+                  <a:lnTo>
+                    <a:pt x="4798709" y="885283"/>
+                  </a:lnTo>
+                  <a:lnTo>
+                    <a:pt x="4870331" y="728768"/>
+                  </a:lnTo>
+                  <a:lnTo>
+                    <a:pt x="4941954" y="563402"/>
+                  </a:lnTo>
+                  <a:lnTo>
+                    <a:pt x="5013576" y="388683"/>
+                  </a:lnTo>
+                  <a:lnTo>
+                    <a:pt x="5085199" y="204083"/>
+                  </a:lnTo>
+                  <a:lnTo>
+                    <a:pt x="5156821" y="9042"/>
+                  </a:lnTo>
+                  <a:lnTo>
+                    <a:pt x="5159964" y="0"/>
                   </a:lnTo>
                 </a:path>
               </a:pathLst>
@@ -3756,312 +3762,312 @@
           </p:nvSpPr>
           <p:spPr>
             <a:xfrm>
-              <a:off x="1172049" y="4244818"/>
-              <a:ext cx="7090630" cy="1238936"/>
+              <a:off x="1172049" y="4297844"/>
+              <a:ext cx="7090630" cy="1181982"/>
             </a:xfrm>
             <a:custGeom>
               <a:avLst/>
               <a:pathLst>
-                <a:path w="7090630" h="1238936">
+                <a:path w="7090630" h="1181982">
                   <a:moveTo>
                     <a:pt x="7090630" y="0"/>
                   </a:moveTo>
                   <a:lnTo>
-                    <a:pt x="7019007" y="9953"/>
-                  </a:lnTo>
-                  <a:lnTo>
-                    <a:pt x="6947385" y="19830"/>
-                  </a:lnTo>
-                  <a:lnTo>
-                    <a:pt x="6875762" y="29632"/>
-                  </a:lnTo>
-                  <a:lnTo>
-                    <a:pt x="6804139" y="39359"/>
-                  </a:lnTo>
-                  <a:lnTo>
-                    <a:pt x="6732517" y="49011"/>
-                  </a:lnTo>
-                  <a:lnTo>
-                    <a:pt x="6660894" y="58591"/>
-                  </a:lnTo>
-                  <a:lnTo>
-                    <a:pt x="6589272" y="68097"/>
-                  </a:lnTo>
-                  <a:lnTo>
-                    <a:pt x="6517649" y="77530"/>
-                  </a:lnTo>
-                  <a:lnTo>
-                    <a:pt x="6446027" y="86892"/>
-                  </a:lnTo>
-                  <a:lnTo>
-                    <a:pt x="6374404" y="96182"/>
-                  </a:lnTo>
-                  <a:lnTo>
-                    <a:pt x="6302782" y="105401"/>
-                  </a:lnTo>
-                  <a:lnTo>
-                    <a:pt x="6231159" y="114550"/>
-                  </a:lnTo>
-                  <a:lnTo>
-                    <a:pt x="6159537" y="123629"/>
-                  </a:lnTo>
-                  <a:lnTo>
-                    <a:pt x="6087914" y="132639"/>
-                  </a:lnTo>
-                  <a:lnTo>
-                    <a:pt x="6016292" y="141580"/>
-                  </a:lnTo>
-                  <a:lnTo>
-                    <a:pt x="5944669" y="150453"/>
-                  </a:lnTo>
-                  <a:lnTo>
-                    <a:pt x="5873047" y="159258"/>
-                  </a:lnTo>
-                  <a:lnTo>
-                    <a:pt x="5801424" y="167996"/>
-                  </a:lnTo>
-                  <a:lnTo>
-                    <a:pt x="5729802" y="176667"/>
-                  </a:lnTo>
-                  <a:lnTo>
-                    <a:pt x="5658179" y="185272"/>
-                  </a:lnTo>
-                  <a:lnTo>
-                    <a:pt x="5586557" y="193811"/>
-                  </a:lnTo>
-                  <a:lnTo>
-                    <a:pt x="5514934" y="202286"/>
-                  </a:lnTo>
-                  <a:lnTo>
-                    <a:pt x="5443311" y="210695"/>
-                  </a:lnTo>
-                  <a:lnTo>
-                    <a:pt x="5371689" y="219041"/>
-                  </a:lnTo>
-                  <a:lnTo>
-                    <a:pt x="5300066" y="227322"/>
-                  </a:lnTo>
-                  <a:lnTo>
-                    <a:pt x="5228444" y="235541"/>
-                  </a:lnTo>
-                  <a:lnTo>
-                    <a:pt x="5156821" y="243697"/>
-                  </a:lnTo>
-                  <a:lnTo>
-                    <a:pt x="5085199" y="251790"/>
-                  </a:lnTo>
-                  <a:lnTo>
-                    <a:pt x="5013576" y="259822"/>
-                  </a:lnTo>
-                  <a:lnTo>
-                    <a:pt x="4941954" y="267793"/>
-                  </a:lnTo>
-                  <a:lnTo>
-                    <a:pt x="4870331" y="275702"/>
-                  </a:lnTo>
-                  <a:lnTo>
-                    <a:pt x="4798709" y="283552"/>
-                  </a:lnTo>
-                  <a:lnTo>
-                    <a:pt x="4727086" y="291341"/>
-                  </a:lnTo>
-                  <a:lnTo>
-                    <a:pt x="4655464" y="299071"/>
-                  </a:lnTo>
-                  <a:lnTo>
-                    <a:pt x="4583841" y="306742"/>
-                  </a:lnTo>
-                  <a:lnTo>
-                    <a:pt x="4512219" y="314355"/>
-                  </a:lnTo>
-                  <a:lnTo>
-                    <a:pt x="4440596" y="321909"/>
-                  </a:lnTo>
-                  <a:lnTo>
-                    <a:pt x="4368974" y="329406"/>
-                  </a:lnTo>
-                  <a:lnTo>
-                    <a:pt x="4297351" y="336846"/>
-                  </a:lnTo>
-                  <a:lnTo>
-                    <a:pt x="4225729" y="344229"/>
-                  </a:lnTo>
-                  <a:lnTo>
-                    <a:pt x="4154106" y="351555"/>
-                  </a:lnTo>
-                  <a:lnTo>
-                    <a:pt x="4082483" y="358826"/>
-                  </a:lnTo>
-                  <a:lnTo>
-                    <a:pt x="4010861" y="366041"/>
-                  </a:lnTo>
-                  <a:lnTo>
-                    <a:pt x="3939238" y="373201"/>
-                  </a:lnTo>
-                  <a:lnTo>
-                    <a:pt x="3867616" y="380306"/>
-                  </a:lnTo>
-                  <a:lnTo>
-                    <a:pt x="3795993" y="387358"/>
-                  </a:lnTo>
-                  <a:lnTo>
-                    <a:pt x="3724371" y="394355"/>
-                  </a:lnTo>
-                  <a:lnTo>
-                    <a:pt x="3652748" y="401299"/>
-                  </a:lnTo>
-                  <a:lnTo>
-                    <a:pt x="3581126" y="408190"/>
-                  </a:lnTo>
-                  <a:lnTo>
-                    <a:pt x="3509503" y="415028"/>
-                  </a:lnTo>
-                  <a:lnTo>
-                    <a:pt x="3437881" y="421815"/>
-                  </a:lnTo>
-                  <a:lnTo>
-                    <a:pt x="3366258" y="428549"/>
-                  </a:lnTo>
-                  <a:lnTo>
-                    <a:pt x="3294636" y="438525"/>
-                  </a:lnTo>
-                  <a:lnTo>
-                    <a:pt x="3223013" y="485795"/>
-                  </a:lnTo>
-                  <a:lnTo>
-                    <a:pt x="3151391" y="530484"/>
-                  </a:lnTo>
-                  <a:lnTo>
-                    <a:pt x="3079768" y="572734"/>
-                  </a:lnTo>
-                  <a:lnTo>
-                    <a:pt x="3008146" y="612677"/>
-                  </a:lnTo>
-                  <a:lnTo>
-                    <a:pt x="2936523" y="650439"/>
-                  </a:lnTo>
-                  <a:lnTo>
-                    <a:pt x="2864901" y="686140"/>
-                  </a:lnTo>
-                  <a:lnTo>
-                    <a:pt x="2793278" y="719892"/>
-                  </a:lnTo>
-                  <a:lnTo>
-                    <a:pt x="2721655" y="751801"/>
-                  </a:lnTo>
-                  <a:lnTo>
-                    <a:pt x="2650033" y="781968"/>
-                  </a:lnTo>
-                  <a:lnTo>
-                    <a:pt x="2578410" y="810489"/>
-                  </a:lnTo>
-                  <a:lnTo>
-                    <a:pt x="2506788" y="837452"/>
-                  </a:lnTo>
-                  <a:lnTo>
-                    <a:pt x="2435165" y="862943"/>
-                  </a:lnTo>
-                  <a:lnTo>
-                    <a:pt x="2363543" y="887043"/>
-                  </a:lnTo>
-                  <a:lnTo>
-                    <a:pt x="2291920" y="909827"/>
-                  </a:lnTo>
-                  <a:lnTo>
-                    <a:pt x="2220298" y="931367"/>
-                  </a:lnTo>
-                  <a:lnTo>
-                    <a:pt x="2148675" y="951731"/>
-                  </a:lnTo>
-                  <a:lnTo>
-                    <a:pt x="2077053" y="970984"/>
-                  </a:lnTo>
-                  <a:lnTo>
-                    <a:pt x="2005430" y="989185"/>
-                  </a:lnTo>
-                  <a:lnTo>
-                    <a:pt x="1933808" y="1006393"/>
-                  </a:lnTo>
-                  <a:lnTo>
-                    <a:pt x="1862185" y="1022661"/>
-                  </a:lnTo>
-                  <a:lnTo>
-                    <a:pt x="1790563" y="1038042"/>
-                  </a:lnTo>
-                  <a:lnTo>
-                    <a:pt x="1718940" y="1052582"/>
-                  </a:lnTo>
-                  <a:lnTo>
-                    <a:pt x="1647318" y="1066329"/>
-                  </a:lnTo>
-                  <a:lnTo>
-                    <a:pt x="1575695" y="1079325"/>
-                  </a:lnTo>
-                  <a:lnTo>
-                    <a:pt x="1504073" y="1091612"/>
-                  </a:lnTo>
-                  <a:lnTo>
-                    <a:pt x="1432450" y="1103228"/>
-                  </a:lnTo>
-                  <a:lnTo>
-                    <a:pt x="1360827" y="1114210"/>
-                  </a:lnTo>
-                  <a:lnTo>
-                    <a:pt x="1289205" y="1124592"/>
-                  </a:lnTo>
-                  <a:lnTo>
-                    <a:pt x="1217582" y="1134408"/>
-                  </a:lnTo>
-                  <a:lnTo>
-                    <a:pt x="1145960" y="1143687"/>
-                  </a:lnTo>
-                  <a:lnTo>
-                    <a:pt x="1074337" y="1152461"/>
-                  </a:lnTo>
-                  <a:lnTo>
-                    <a:pt x="1002715" y="1160755"/>
-                  </a:lnTo>
-                  <a:lnTo>
-                    <a:pt x="931092" y="1168596"/>
-                  </a:lnTo>
-                  <a:lnTo>
-                    <a:pt x="859470" y="1176009"/>
-                  </a:lnTo>
-                  <a:lnTo>
-                    <a:pt x="787847" y="1183018"/>
-                  </a:lnTo>
-                  <a:lnTo>
-                    <a:pt x="716225" y="1189644"/>
-                  </a:lnTo>
-                  <a:lnTo>
-                    <a:pt x="644602" y="1195908"/>
-                  </a:lnTo>
-                  <a:lnTo>
-                    <a:pt x="572980" y="1201830"/>
-                  </a:lnTo>
-                  <a:lnTo>
-                    <a:pt x="501357" y="1207429"/>
-                  </a:lnTo>
-                  <a:lnTo>
-                    <a:pt x="429735" y="1212722"/>
-                  </a:lnTo>
-                  <a:lnTo>
-                    <a:pt x="358112" y="1217727"/>
-                  </a:lnTo>
-                  <a:lnTo>
-                    <a:pt x="286490" y="1222458"/>
-                  </a:lnTo>
-                  <a:lnTo>
-                    <a:pt x="214867" y="1226930"/>
-                  </a:lnTo>
-                  <a:lnTo>
-                    <a:pt x="143245" y="1231159"/>
-                  </a:lnTo>
-                  <a:lnTo>
-                    <a:pt x="71622" y="1235157"/>
-                  </a:lnTo>
-                  <a:lnTo>
-                    <a:pt x="0" y="1238936"/>
+                    <a:pt x="7019007" y="8555"/>
+                  </a:lnTo>
+                  <a:lnTo>
+                    <a:pt x="6947385" y="17052"/>
+                  </a:lnTo>
+                  <a:lnTo>
+                    <a:pt x="6875762" y="25490"/>
+                  </a:lnTo>
+                  <a:lnTo>
+                    <a:pt x="6804139" y="33871"/>
+                  </a:lnTo>
+                  <a:lnTo>
+                    <a:pt x="6732517" y="42195"/>
+                  </a:lnTo>
+                  <a:lnTo>
+                    <a:pt x="6660894" y="50462"/>
+                  </a:lnTo>
+                  <a:lnTo>
+                    <a:pt x="6589272" y="58672"/>
+                  </a:lnTo>
+                  <a:lnTo>
+                    <a:pt x="6517649" y="66826"/>
+                  </a:lnTo>
+                  <a:lnTo>
+                    <a:pt x="6446027" y="74924"/>
+                  </a:lnTo>
+                  <a:lnTo>
+                    <a:pt x="6374404" y="82967"/>
+                  </a:lnTo>
+                  <a:lnTo>
+                    <a:pt x="6302782" y="90955"/>
+                  </a:lnTo>
+                  <a:lnTo>
+                    <a:pt x="6231159" y="98889"/>
+                  </a:lnTo>
+                  <a:lnTo>
+                    <a:pt x="6159537" y="106768"/>
+                  </a:lnTo>
+                  <a:lnTo>
+                    <a:pt x="6087914" y="114593"/>
+                  </a:lnTo>
+                  <a:lnTo>
+                    <a:pt x="6016292" y="122365"/>
+                  </a:lnTo>
+                  <a:lnTo>
+                    <a:pt x="5944669" y="130084"/>
+                  </a:lnTo>
+                  <a:lnTo>
+                    <a:pt x="5873047" y="137750"/>
+                  </a:lnTo>
+                  <a:lnTo>
+                    <a:pt x="5801424" y="145363"/>
+                  </a:lnTo>
+                  <a:lnTo>
+                    <a:pt x="5729802" y="152925"/>
+                  </a:lnTo>
+                  <a:lnTo>
+                    <a:pt x="5658179" y="160434"/>
+                  </a:lnTo>
+                  <a:lnTo>
+                    <a:pt x="5586557" y="167893"/>
+                  </a:lnTo>
+                  <a:lnTo>
+                    <a:pt x="5514934" y="175300"/>
+                  </a:lnTo>
+                  <a:lnTo>
+                    <a:pt x="5443311" y="182657"/>
+                  </a:lnTo>
+                  <a:lnTo>
+                    <a:pt x="5371689" y="189963"/>
+                  </a:lnTo>
+                  <a:lnTo>
+                    <a:pt x="5300066" y="197220"/>
+                  </a:lnTo>
+                  <a:lnTo>
+                    <a:pt x="5228444" y="204427"/>
+                  </a:lnTo>
+                  <a:lnTo>
+                    <a:pt x="5156821" y="211584"/>
+                  </a:lnTo>
+                  <a:lnTo>
+                    <a:pt x="5085199" y="218693"/>
+                  </a:lnTo>
+                  <a:lnTo>
+                    <a:pt x="5013576" y="225753"/>
+                  </a:lnTo>
+                  <a:lnTo>
+                    <a:pt x="4941954" y="232765"/>
+                  </a:lnTo>
+                  <a:lnTo>
+                    <a:pt x="4870331" y="239729"/>
+                  </a:lnTo>
+                  <a:lnTo>
+                    <a:pt x="4798709" y="246645"/>
+                  </a:lnTo>
+                  <a:lnTo>
+                    <a:pt x="4727086" y="253514"/>
+                  </a:lnTo>
+                  <a:lnTo>
+                    <a:pt x="4655464" y="260336"/>
+                  </a:lnTo>
+                  <a:lnTo>
+                    <a:pt x="4583841" y="267112"/>
+                  </a:lnTo>
+                  <a:lnTo>
+                    <a:pt x="4512219" y="273841"/>
+                  </a:lnTo>
+                  <a:lnTo>
+                    <a:pt x="4440596" y="280524"/>
+                  </a:lnTo>
+                  <a:lnTo>
+                    <a:pt x="4368974" y="287161"/>
+                  </a:lnTo>
+                  <a:lnTo>
+                    <a:pt x="4297351" y="293753"/>
+                  </a:lnTo>
+                  <a:lnTo>
+                    <a:pt x="4225729" y="300300"/>
+                  </a:lnTo>
+                  <a:lnTo>
+                    <a:pt x="4154106" y="306802"/>
+                  </a:lnTo>
+                  <a:lnTo>
+                    <a:pt x="4082483" y="313260"/>
+                  </a:lnTo>
+                  <a:lnTo>
+                    <a:pt x="4010861" y="319674"/>
+                  </a:lnTo>
+                  <a:lnTo>
+                    <a:pt x="3939238" y="326043"/>
+                  </a:lnTo>
+                  <a:lnTo>
+                    <a:pt x="3867616" y="332370"/>
+                  </a:lnTo>
+                  <a:lnTo>
+                    <a:pt x="3795993" y="338652"/>
+                  </a:lnTo>
+                  <a:lnTo>
+                    <a:pt x="3724371" y="344892"/>
+                  </a:lnTo>
+                  <a:lnTo>
+                    <a:pt x="3652748" y="351090"/>
+                  </a:lnTo>
+                  <a:lnTo>
+                    <a:pt x="3581126" y="357245"/>
+                  </a:lnTo>
+                  <a:lnTo>
+                    <a:pt x="3509503" y="363358"/>
+                  </a:lnTo>
+                  <a:lnTo>
+                    <a:pt x="3437881" y="369429"/>
+                  </a:lnTo>
+                  <a:lnTo>
+                    <a:pt x="3366258" y="375458"/>
+                  </a:lnTo>
+                  <a:lnTo>
+                    <a:pt x="3294636" y="381447"/>
+                  </a:lnTo>
+                  <a:lnTo>
+                    <a:pt x="3223013" y="426427"/>
+                  </a:lnTo>
+                  <a:lnTo>
+                    <a:pt x="3151391" y="470586"/>
+                  </a:lnTo>
+                  <a:lnTo>
+                    <a:pt x="3079768" y="512381"/>
+                  </a:lnTo>
+                  <a:lnTo>
+                    <a:pt x="3008146" y="551938"/>
+                  </a:lnTo>
+                  <a:lnTo>
+                    <a:pt x="2936523" y="589378"/>
+                  </a:lnTo>
+                  <a:lnTo>
+                    <a:pt x="2864901" y="624814"/>
+                  </a:lnTo>
+                  <a:lnTo>
+                    <a:pt x="2793278" y="658353"/>
+                  </a:lnTo>
+                  <a:lnTo>
+                    <a:pt x="2721655" y="690096"/>
+                  </a:lnTo>
+                  <a:lnTo>
+                    <a:pt x="2650033" y="720141"/>
+                  </a:lnTo>
+                  <a:lnTo>
+                    <a:pt x="2578410" y="748577"/>
+                  </a:lnTo>
+                  <a:lnTo>
+                    <a:pt x="2506788" y="775491"/>
+                  </a:lnTo>
+                  <a:lnTo>
+                    <a:pt x="2435165" y="800964"/>
+                  </a:lnTo>
+                  <a:lnTo>
+                    <a:pt x="2363543" y="825074"/>
+                  </a:lnTo>
+                  <a:lnTo>
+                    <a:pt x="2291920" y="847893"/>
+                  </a:lnTo>
+                  <a:lnTo>
+                    <a:pt x="2220298" y="869490"/>
+                  </a:lnTo>
+                  <a:lnTo>
+                    <a:pt x="2148675" y="889932"/>
+                  </a:lnTo>
+                  <a:lnTo>
+                    <a:pt x="2077053" y="909279"/>
+                  </a:lnTo>
+                  <a:lnTo>
+                    <a:pt x="2005430" y="927591"/>
+                  </a:lnTo>
+                  <a:lnTo>
+                    <a:pt x="1933808" y="944922"/>
+                  </a:lnTo>
+                  <a:lnTo>
+                    <a:pt x="1862185" y="961326"/>
+                  </a:lnTo>
+                  <a:lnTo>
+                    <a:pt x="1790563" y="976851"/>
+                  </a:lnTo>
+                  <a:lnTo>
+                    <a:pt x="1718940" y="991546"/>
+                  </a:lnTo>
+                  <a:lnTo>
+                    <a:pt x="1647318" y="1005454"/>
+                  </a:lnTo>
+                  <a:lnTo>
+                    <a:pt x="1575695" y="1018617"/>
+                  </a:lnTo>
+                  <a:lnTo>
+                    <a:pt x="1504073" y="1031076"/>
+                  </a:lnTo>
+                  <a:lnTo>
+                    <a:pt x="1432450" y="1042868"/>
+                  </a:lnTo>
+                  <a:lnTo>
+                    <a:pt x="1360827" y="1054028"/>
+                  </a:lnTo>
+                  <a:lnTo>
+                    <a:pt x="1289205" y="1064591"/>
+                  </a:lnTo>
+                  <a:lnTo>
+                    <a:pt x="1217582" y="1074589"/>
+                  </a:lnTo>
+                  <a:lnTo>
+                    <a:pt x="1145960" y="1084052"/>
+                  </a:lnTo>
+                  <a:lnTo>
+                    <a:pt x="1074337" y="1093008"/>
+                  </a:lnTo>
+                  <a:lnTo>
+                    <a:pt x="1002715" y="1101485"/>
+                  </a:lnTo>
+                  <a:lnTo>
+                    <a:pt x="931092" y="1109507"/>
+                  </a:lnTo>
+                  <a:lnTo>
+                    <a:pt x="859470" y="1117101"/>
+                  </a:lnTo>
+                  <a:lnTo>
+                    <a:pt x="787847" y="1124288"/>
+                  </a:lnTo>
+                  <a:lnTo>
+                    <a:pt x="716225" y="1131090"/>
+                  </a:lnTo>
+                  <a:lnTo>
+                    <a:pt x="644602" y="1137528"/>
+                  </a:lnTo>
+                  <a:lnTo>
+                    <a:pt x="572980" y="1143622"/>
+                  </a:lnTo>
+                  <a:lnTo>
+                    <a:pt x="501357" y="1149389"/>
+                  </a:lnTo>
+                  <a:lnTo>
+                    <a:pt x="429735" y="1154848"/>
+                  </a:lnTo>
+                  <a:lnTo>
+                    <a:pt x="358112" y="1160014"/>
+                  </a:lnTo>
+                  <a:lnTo>
+                    <a:pt x="286490" y="1164904"/>
+                  </a:lnTo>
+                  <a:lnTo>
+                    <a:pt x="214867" y="1169532"/>
+                  </a:lnTo>
+                  <a:lnTo>
+                    <a:pt x="143245" y="1173912"/>
+                  </a:lnTo>
+                  <a:lnTo>
+                    <a:pt x="71622" y="1178058"/>
+                  </a:lnTo>
+                  <a:lnTo>
+                    <a:pt x="0" y="1181982"/>
                   </a:lnTo>
                 </a:path>
               </a:pathLst>
@@ -4082,290 +4088,293 @@
           <p:spPr>
             <a:xfrm>
               <a:off x="1172049" y="1896563"/>
-              <a:ext cx="6522293" cy="3452658"/>
+              <a:ext cx="6613798" cy="3442831"/>
             </a:xfrm>
             <a:custGeom>
               <a:avLst/>
               <a:pathLst>
-                <a:path w="6522293" h="3452658">
+                <a:path w="6613798" h="3442831">
                   <a:moveTo>
-                    <a:pt x="0" y="3452658"/>
+                    <a:pt x="0" y="3442831"/>
                   </a:moveTo>
                   <a:lnTo>
-                    <a:pt x="71622" y="3446176"/>
-                  </a:lnTo>
-                  <a:lnTo>
-                    <a:pt x="143245" y="3439484"/>
-                  </a:lnTo>
-                  <a:lnTo>
-                    <a:pt x="214867" y="3432574"/>
-                  </a:lnTo>
-                  <a:lnTo>
-                    <a:pt x="286490" y="3425441"/>
-                  </a:lnTo>
-                  <a:lnTo>
-                    <a:pt x="358112" y="3418077"/>
-                  </a:lnTo>
-                  <a:lnTo>
-                    <a:pt x="429735" y="3410473"/>
-                  </a:lnTo>
-                  <a:lnTo>
-                    <a:pt x="501357" y="3402624"/>
-                  </a:lnTo>
-                  <a:lnTo>
-                    <a:pt x="572980" y="3394520"/>
-                  </a:lnTo>
-                  <a:lnTo>
-                    <a:pt x="644602" y="3386153"/>
-                  </a:lnTo>
-                  <a:lnTo>
-                    <a:pt x="716225" y="3377515"/>
-                  </a:lnTo>
-                  <a:lnTo>
-                    <a:pt x="787847" y="3368597"/>
-                  </a:lnTo>
-                  <a:lnTo>
-                    <a:pt x="859470" y="3359390"/>
-                  </a:lnTo>
-                  <a:lnTo>
-                    <a:pt x="931092" y="3349884"/>
-                  </a:lnTo>
-                  <a:lnTo>
-                    <a:pt x="1002715" y="3340071"/>
-                  </a:lnTo>
-                  <a:lnTo>
-                    <a:pt x="1074337" y="3329939"/>
-                  </a:lnTo>
-                  <a:lnTo>
-                    <a:pt x="1145960" y="3319479"/>
-                  </a:lnTo>
-                  <a:lnTo>
-                    <a:pt x="1217582" y="3308680"/>
-                  </a:lnTo>
-                  <a:lnTo>
-                    <a:pt x="1289205" y="3297531"/>
-                  </a:lnTo>
-                  <a:lnTo>
-                    <a:pt x="1360827" y="3286020"/>
-                  </a:lnTo>
-                  <a:lnTo>
-                    <a:pt x="1432450" y="3274136"/>
-                  </a:lnTo>
-                  <a:lnTo>
-                    <a:pt x="1504073" y="3261868"/>
-                  </a:lnTo>
-                  <a:lnTo>
-                    <a:pt x="1575695" y="3249201"/>
-                  </a:lnTo>
-                  <a:lnTo>
-                    <a:pt x="1647318" y="3236124"/>
-                  </a:lnTo>
-                  <a:lnTo>
-                    <a:pt x="1718940" y="3222623"/>
-                  </a:lnTo>
-                  <a:lnTo>
-                    <a:pt x="1790563" y="3208684"/>
-                  </a:lnTo>
-                  <a:lnTo>
-                    <a:pt x="1862185" y="3194294"/>
-                  </a:lnTo>
-                  <a:lnTo>
-                    <a:pt x="1933808" y="3179437"/>
-                  </a:lnTo>
-                  <a:lnTo>
-                    <a:pt x="2005430" y="3164098"/>
-                  </a:lnTo>
-                  <a:lnTo>
-                    <a:pt x="2077053" y="3148263"/>
-                  </a:lnTo>
-                  <a:lnTo>
-                    <a:pt x="2148675" y="3131914"/>
-                  </a:lnTo>
-                  <a:lnTo>
-                    <a:pt x="2220298" y="3115035"/>
-                  </a:lnTo>
-                  <a:lnTo>
-                    <a:pt x="2291920" y="3097609"/>
-                  </a:lnTo>
-                  <a:lnTo>
-                    <a:pt x="2363543" y="3079618"/>
-                  </a:lnTo>
-                  <a:lnTo>
-                    <a:pt x="2435165" y="3061044"/>
-                  </a:lnTo>
-                  <a:lnTo>
-                    <a:pt x="2506788" y="3041868"/>
-                  </a:lnTo>
-                  <a:lnTo>
-                    <a:pt x="2578410" y="3022071"/>
-                  </a:lnTo>
-                  <a:lnTo>
-                    <a:pt x="2650033" y="3001631"/>
-                  </a:lnTo>
-                  <a:lnTo>
-                    <a:pt x="2721655" y="2980530"/>
-                  </a:lnTo>
-                  <a:lnTo>
-                    <a:pt x="2793278" y="2958744"/>
-                  </a:lnTo>
-                  <a:lnTo>
-                    <a:pt x="2864901" y="2936252"/>
-                  </a:lnTo>
-                  <a:lnTo>
-                    <a:pt x="2936523" y="2913031"/>
-                  </a:lnTo>
-                  <a:lnTo>
-                    <a:pt x="3008146" y="2889057"/>
-                  </a:lnTo>
-                  <a:lnTo>
-                    <a:pt x="3079768" y="2864306"/>
-                  </a:lnTo>
-                  <a:lnTo>
-                    <a:pt x="3151391" y="2838753"/>
-                  </a:lnTo>
-                  <a:lnTo>
-                    <a:pt x="3223013" y="2812372"/>
-                  </a:lnTo>
-                  <a:lnTo>
-                    <a:pt x="3294636" y="2785136"/>
-                  </a:lnTo>
-                  <a:lnTo>
-                    <a:pt x="3366258" y="2757016"/>
-                  </a:lnTo>
-                  <a:lnTo>
-                    <a:pt x="3437881" y="2727986"/>
-                  </a:lnTo>
-                  <a:lnTo>
-                    <a:pt x="3509503" y="2698014"/>
-                  </a:lnTo>
-                  <a:lnTo>
-                    <a:pt x="3581126" y="2667071"/>
-                  </a:lnTo>
-                  <a:lnTo>
-                    <a:pt x="3652748" y="2635124"/>
-                  </a:lnTo>
-                  <a:lnTo>
-                    <a:pt x="3724371" y="2602143"/>
-                  </a:lnTo>
-                  <a:lnTo>
-                    <a:pt x="3795993" y="2568092"/>
-                  </a:lnTo>
-                  <a:lnTo>
-                    <a:pt x="3867616" y="2532937"/>
-                  </a:lnTo>
-                  <a:lnTo>
-                    <a:pt x="3939238" y="2496643"/>
-                  </a:lnTo>
-                  <a:lnTo>
-                    <a:pt x="4010861" y="2459173"/>
-                  </a:lnTo>
-                  <a:lnTo>
-                    <a:pt x="4082483" y="2420488"/>
-                  </a:lnTo>
-                  <a:lnTo>
-                    <a:pt x="4154106" y="2380549"/>
-                  </a:lnTo>
-                  <a:lnTo>
-                    <a:pt x="4225729" y="2339316"/>
-                  </a:lnTo>
-                  <a:lnTo>
-                    <a:pt x="4297351" y="2296746"/>
-                  </a:lnTo>
-                  <a:lnTo>
-                    <a:pt x="4368974" y="2252796"/>
-                  </a:lnTo>
-                  <a:lnTo>
-                    <a:pt x="4440596" y="2207421"/>
-                  </a:lnTo>
-                  <a:lnTo>
-                    <a:pt x="4512219" y="2160576"/>
-                  </a:lnTo>
-                  <a:lnTo>
-                    <a:pt x="4583841" y="2112212"/>
-                  </a:lnTo>
-                  <a:lnTo>
-                    <a:pt x="4655464" y="2062281"/>
-                  </a:lnTo>
-                  <a:lnTo>
-                    <a:pt x="4727086" y="2010731"/>
-                  </a:lnTo>
-                  <a:lnTo>
-                    <a:pt x="4798709" y="1957510"/>
-                  </a:lnTo>
-                  <a:lnTo>
-                    <a:pt x="4870331" y="1902565"/>
-                  </a:lnTo>
-                  <a:lnTo>
-                    <a:pt x="4941954" y="1845838"/>
-                  </a:lnTo>
-                  <a:lnTo>
-                    <a:pt x="5013576" y="1787272"/>
-                  </a:lnTo>
-                  <a:lnTo>
-                    <a:pt x="5085199" y="1726808"/>
-                  </a:lnTo>
-                  <a:lnTo>
-                    <a:pt x="5156821" y="1664385"/>
-                  </a:lnTo>
-                  <a:lnTo>
-                    <a:pt x="5228444" y="1599937"/>
-                  </a:lnTo>
-                  <a:lnTo>
-                    <a:pt x="5300066" y="1533401"/>
-                  </a:lnTo>
-                  <a:lnTo>
-                    <a:pt x="5371689" y="1464709"/>
-                  </a:lnTo>
-                  <a:lnTo>
-                    <a:pt x="5443311" y="1393789"/>
-                  </a:lnTo>
-                  <a:lnTo>
-                    <a:pt x="5514934" y="1320571"/>
-                  </a:lnTo>
-                  <a:lnTo>
-                    <a:pt x="5586557" y="1244979"/>
-                  </a:lnTo>
-                  <a:lnTo>
-                    <a:pt x="5658179" y="1166938"/>
-                  </a:lnTo>
-                  <a:lnTo>
-                    <a:pt x="5729802" y="1086366"/>
-                  </a:lnTo>
-                  <a:lnTo>
-                    <a:pt x="5801424" y="1003183"/>
-                  </a:lnTo>
-                  <a:lnTo>
-                    <a:pt x="5873047" y="917304"/>
-                  </a:lnTo>
-                  <a:lnTo>
-                    <a:pt x="5944669" y="828641"/>
-                  </a:lnTo>
-                  <a:lnTo>
-                    <a:pt x="6016292" y="737104"/>
-                  </a:lnTo>
-                  <a:lnTo>
-                    <a:pt x="6087914" y="642601"/>
-                  </a:lnTo>
-                  <a:lnTo>
-                    <a:pt x="6159537" y="545033"/>
-                  </a:lnTo>
-                  <a:lnTo>
-                    <a:pt x="6231159" y="444304"/>
-                  </a:lnTo>
-                  <a:lnTo>
-                    <a:pt x="6302782" y="340309"/>
-                  </a:lnTo>
-                  <a:lnTo>
-                    <a:pt x="6374404" y="232944"/>
-                  </a:lnTo>
-                  <a:lnTo>
-                    <a:pt x="6446027" y="122098"/>
-                  </a:lnTo>
-                  <a:lnTo>
-                    <a:pt x="6517649" y="7659"/>
-                  </a:lnTo>
-                  <a:lnTo>
-                    <a:pt x="6522293" y="0"/>
+                    <a:pt x="71622" y="3436239"/>
+                  </a:lnTo>
+                  <a:lnTo>
+                    <a:pt x="143245" y="3429439"/>
+                  </a:lnTo>
+                  <a:lnTo>
+                    <a:pt x="214867" y="3422426"/>
+                  </a:lnTo>
+                  <a:lnTo>
+                    <a:pt x="286490" y="3415192"/>
+                  </a:lnTo>
+                  <a:lnTo>
+                    <a:pt x="358112" y="3407731"/>
+                  </a:lnTo>
+                  <a:lnTo>
+                    <a:pt x="429735" y="3400035"/>
+                  </a:lnTo>
+                  <a:lnTo>
+                    <a:pt x="501357" y="3392098"/>
+                  </a:lnTo>
+                  <a:lnTo>
+                    <a:pt x="572980" y="3383911"/>
+                  </a:lnTo>
+                  <a:lnTo>
+                    <a:pt x="644602" y="3375467"/>
+                  </a:lnTo>
+                  <a:lnTo>
+                    <a:pt x="716225" y="3366758"/>
+                  </a:lnTo>
+                  <a:lnTo>
+                    <a:pt x="787847" y="3357775"/>
+                  </a:lnTo>
+                  <a:lnTo>
+                    <a:pt x="859470" y="3348510"/>
+                  </a:lnTo>
+                  <a:lnTo>
+                    <a:pt x="931092" y="3338953"/>
+                  </a:lnTo>
+                  <a:lnTo>
+                    <a:pt x="1002715" y="3329097"/>
+                  </a:lnTo>
+                  <a:lnTo>
+                    <a:pt x="1074337" y="3318930"/>
+                  </a:lnTo>
+                  <a:lnTo>
+                    <a:pt x="1145960" y="3308445"/>
+                  </a:lnTo>
+                  <a:lnTo>
+                    <a:pt x="1217582" y="3297629"/>
+                  </a:lnTo>
+                  <a:lnTo>
+                    <a:pt x="1289205" y="3286474"/>
+                  </a:lnTo>
+                  <a:lnTo>
+                    <a:pt x="1360827" y="3274969"/>
+                  </a:lnTo>
+                  <a:lnTo>
+                    <a:pt x="1432450" y="3263102"/>
+                  </a:lnTo>
+                  <a:lnTo>
+                    <a:pt x="1504073" y="3250862"/>
+                  </a:lnTo>
+                  <a:lnTo>
+                    <a:pt x="1575695" y="3238237"/>
+                  </a:lnTo>
+                  <a:lnTo>
+                    <a:pt x="1647318" y="3225216"/>
+                  </a:lnTo>
+                  <a:lnTo>
+                    <a:pt x="1718940" y="3211785"/>
+                  </a:lnTo>
+                  <a:lnTo>
+                    <a:pt x="1790563" y="3197933"/>
+                  </a:lnTo>
+                  <a:lnTo>
+                    <a:pt x="1862185" y="3183645"/>
+                  </a:lnTo>
+                  <a:lnTo>
+                    <a:pt x="1933808" y="3168909"/>
+                  </a:lnTo>
+                  <a:lnTo>
+                    <a:pt x="2005430" y="3153709"/>
+                  </a:lnTo>
+                  <a:lnTo>
+                    <a:pt x="2077053" y="3138032"/>
+                  </a:lnTo>
+                  <a:lnTo>
+                    <a:pt x="2148675" y="3121862"/>
+                  </a:lnTo>
+                  <a:lnTo>
+                    <a:pt x="2220298" y="3105184"/>
+                  </a:lnTo>
+                  <a:lnTo>
+                    <a:pt x="2291920" y="3087982"/>
+                  </a:lnTo>
+                  <a:lnTo>
+                    <a:pt x="2363543" y="3070239"/>
+                  </a:lnTo>
+                  <a:lnTo>
+                    <a:pt x="2435165" y="3051939"/>
+                  </a:lnTo>
+                  <a:lnTo>
+                    <a:pt x="2506788" y="3033064"/>
+                  </a:lnTo>
+                  <a:lnTo>
+                    <a:pt x="2578410" y="3013596"/>
+                  </a:lnTo>
+                  <a:lnTo>
+                    <a:pt x="2650033" y="2993516"/>
+                  </a:lnTo>
+                  <a:lnTo>
+                    <a:pt x="2721655" y="2972805"/>
+                  </a:lnTo>
+                  <a:lnTo>
+                    <a:pt x="2793278" y="2951444"/>
+                  </a:lnTo>
+                  <a:lnTo>
+                    <a:pt x="2864901" y="2929411"/>
+                  </a:lnTo>
+                  <a:lnTo>
+                    <a:pt x="2936523" y="2906686"/>
+                  </a:lnTo>
+                  <a:lnTo>
+                    <a:pt x="3008146" y="2883247"/>
+                  </a:lnTo>
+                  <a:lnTo>
+                    <a:pt x="3079768" y="2859071"/>
+                  </a:lnTo>
+                  <a:lnTo>
+                    <a:pt x="3151391" y="2834136"/>
+                  </a:lnTo>
+                  <a:lnTo>
+                    <a:pt x="3223013" y="2808417"/>
+                  </a:lnTo>
+                  <a:lnTo>
+                    <a:pt x="3294636" y="2781891"/>
+                  </a:lnTo>
+                  <a:lnTo>
+                    <a:pt x="3366258" y="2754530"/>
+                  </a:lnTo>
+                  <a:lnTo>
+                    <a:pt x="3437881" y="2726310"/>
+                  </a:lnTo>
+                  <a:lnTo>
+                    <a:pt x="3509503" y="2697203"/>
+                  </a:lnTo>
+                  <a:lnTo>
+                    <a:pt x="3581126" y="2667182"/>
+                  </a:lnTo>
+                  <a:lnTo>
+                    <a:pt x="3652748" y="2636217"/>
+                  </a:lnTo>
+                  <a:lnTo>
+                    <a:pt x="3724371" y="2604280"/>
+                  </a:lnTo>
+                  <a:lnTo>
+                    <a:pt x="3795993" y="2571339"/>
+                  </a:lnTo>
+                  <a:lnTo>
+                    <a:pt x="3867616" y="2537362"/>
+                  </a:lnTo>
+                  <a:lnTo>
+                    <a:pt x="3939238" y="2502319"/>
+                  </a:lnTo>
+                  <a:lnTo>
+                    <a:pt x="4010861" y="2466174"/>
+                  </a:lnTo>
+                  <a:lnTo>
+                    <a:pt x="4082483" y="2428893"/>
+                  </a:lnTo>
+                  <a:lnTo>
+                    <a:pt x="4154106" y="2390441"/>
+                  </a:lnTo>
+                  <a:lnTo>
+                    <a:pt x="4225729" y="2350781"/>
+                  </a:lnTo>
+                  <a:lnTo>
+                    <a:pt x="4297351" y="2309874"/>
+                  </a:lnTo>
+                  <a:lnTo>
+                    <a:pt x="4368974" y="2267682"/>
+                  </a:lnTo>
+                  <a:lnTo>
+                    <a:pt x="4440596" y="2224165"/>
+                  </a:lnTo>
+                  <a:lnTo>
+                    <a:pt x="4512219" y="2179280"/>
+                  </a:lnTo>
+                  <a:lnTo>
+                    <a:pt x="4583841" y="2132984"/>
+                  </a:lnTo>
+                  <a:lnTo>
+                    <a:pt x="4655464" y="2085234"/>
+                  </a:lnTo>
+                  <a:lnTo>
+                    <a:pt x="4727086" y="2035984"/>
+                  </a:lnTo>
+                  <a:lnTo>
+                    <a:pt x="4798709" y="1985186"/>
+                  </a:lnTo>
+                  <a:lnTo>
+                    <a:pt x="4870331" y="1932792"/>
+                  </a:lnTo>
+                  <a:lnTo>
+                    <a:pt x="4941954" y="1878752"/>
+                  </a:lnTo>
+                  <a:lnTo>
+                    <a:pt x="5013576" y="1823013"/>
+                  </a:lnTo>
+                  <a:lnTo>
+                    <a:pt x="5085199" y="1765524"/>
+                  </a:lnTo>
+                  <a:lnTo>
+                    <a:pt x="5156821" y="1706228"/>
+                  </a:lnTo>
+                  <a:lnTo>
+                    <a:pt x="5228444" y="1645068"/>
+                  </a:lnTo>
+                  <a:lnTo>
+                    <a:pt x="5300066" y="1581987"/>
+                  </a:lnTo>
+                  <a:lnTo>
+                    <a:pt x="5371689" y="1516924"/>
+                  </a:lnTo>
+                  <a:lnTo>
+                    <a:pt x="5443311" y="1449816"/>
+                  </a:lnTo>
+                  <a:lnTo>
+                    <a:pt x="5514934" y="1380600"/>
+                  </a:lnTo>
+                  <a:lnTo>
+                    <a:pt x="5586557" y="1309209"/>
+                  </a:lnTo>
+                  <a:lnTo>
+                    <a:pt x="5658179" y="1235575"/>
+                  </a:lnTo>
+                  <a:lnTo>
+                    <a:pt x="5729802" y="1159627"/>
+                  </a:lnTo>
+                  <a:lnTo>
+                    <a:pt x="5801424" y="1081293"/>
+                  </a:lnTo>
+                  <a:lnTo>
+                    <a:pt x="5873047" y="1000497"/>
+                  </a:lnTo>
+                  <a:lnTo>
+                    <a:pt x="5944669" y="917163"/>
+                  </a:lnTo>
+                  <a:lnTo>
+                    <a:pt x="6016292" y="831210"/>
+                  </a:lnTo>
+                  <a:lnTo>
+                    <a:pt x="6087914" y="742556"/>
+                  </a:lnTo>
+                  <a:lnTo>
+                    <a:pt x="6159537" y="651117"/>
+                  </a:lnTo>
+                  <a:lnTo>
+                    <a:pt x="6231159" y="556804"/>
+                  </a:lnTo>
+                  <a:lnTo>
+                    <a:pt x="6302782" y="459528"/>
+                  </a:lnTo>
+                  <a:lnTo>
+                    <a:pt x="6374404" y="359196"/>
+                  </a:lnTo>
+                  <a:lnTo>
+                    <a:pt x="6446027" y="255711"/>
+                  </a:lnTo>
+                  <a:lnTo>
+                    <a:pt x="6517649" y="148974"/>
+                  </a:lnTo>
+                  <a:lnTo>
+                    <a:pt x="6589272" y="38883"/>
+                  </a:lnTo>
+                  <a:lnTo>
+                    <a:pt x="6613798" y="0"/>
                   </a:lnTo>
                 </a:path>
               </a:pathLst>
@@ -4437,7 +4446,7 @@
           </p:nvSpPr>
           <p:spPr>
             <a:xfrm>
-              <a:off x="4472293" y="1896563"/>
+              <a:off x="4463824" y="1896563"/>
               <a:ext cx="0" cy="3826579"/>
             </a:xfrm>
             <a:custGeom>
@@ -4710,7 +4719,7 @@
           </p:nvSpPr>
           <p:spPr>
             <a:xfrm>
-              <a:off x="2004858" y="5785772"/>
+              <a:off x="2005445" y="5785772"/>
               <a:ext cx="223753" cy="80101"/>
             </a:xfrm>
             <a:prstGeom prst="rect">
@@ -4756,7 +4765,7 @@
           </p:nvSpPr>
           <p:spPr>
             <a:xfrm>
-              <a:off x="4499764" y="5785772"/>
+              <a:off x="4497209" y="5785772"/>
               <a:ext cx="62179" cy="80101"/>
             </a:xfrm>
             <a:prstGeom prst="rect">
@@ -4802,7 +4811,7 @@
           </p:nvSpPr>
           <p:spPr>
             <a:xfrm>
-              <a:off x="6851704" y="5785772"/>
+              <a:off x="6846007" y="5785772"/>
               <a:ext cx="186537" cy="80101"/>
             </a:xfrm>
             <a:prstGeom prst="rect">
